--- a/docs/AgriSense_Edge_Presentation.pptx
+++ b/docs/AgriSense_Edge_Presentation.pptx
@@ -13,6 +13,8 @@
     <p:sldId id="261" r:id="rId12"/>
     <p:sldId id="262" r:id="rId13"/>
     <p:sldId id="263" r:id="rId14"/>
+    <p:sldId id="264" r:id="rId15"/>
+    <p:sldId id="265" r:id="rId16"/>
   </p:sldIdLst>
   <p:sldSz cx="12191695" cy="6858000" type="screen4x3"/>
   <p:notesSz cx="6858000" cy="9144000"/>
@@ -3110,7 +3112,7 @@
             <a:avLst/>
           </a:prstGeom>
           <a:solidFill>
-            <a:srgbClr val="0F1C14"/>
+            <a:srgbClr val="0D1711"/>
           </a:solidFill>
           <a:ln>
             <a:noFill/>
@@ -3146,18 +3148,18 @@
         </p:nvSpPr>
         <p:spPr>
           <a:xfrm>
-            <a:off x="731520" y="1645920"/>
-            <a:ext cx="10728655" cy="4114800"/>
+            <a:off x="731520" y="1463040"/>
+            <a:ext cx="10728655" cy="4297680"/>
           </a:xfrm>
           <a:prstGeom prst="rect">
             <a:avLst/>
           </a:prstGeom>
           <a:solidFill>
-            <a:srgbClr val="182A1F"/>
+            <a:srgbClr val="16261C"/>
           </a:solidFill>
           <a:ln w="19050">
             <a:solidFill>
-              <a:srgbClr val="284434"/>
+              <a:srgbClr val="274231"/>
             </a:solidFill>
           </a:ln>
         </p:spPr>
@@ -3191,8 +3193,8 @@
         </p:nvSpPr>
         <p:spPr>
           <a:xfrm>
-            <a:off x="1097280" y="2011680"/>
-            <a:ext cx="9601200" cy="1097280"/>
+            <a:off x="1097280" y="1737360"/>
+            <a:ext cx="10058400" cy="1188720"/>
           </a:xfrm>
           <a:prstGeom prst="rect">
             <a:avLst/>
@@ -3206,26 +3208,26 @@
           <a:lstStyle/>
           <a:p>
             <a:pPr>
-              <a:defRPr sz="4400" b="1">
-                <a:solidFill>
-                  <a:srgbClr val="2EAF69"/>
+              <a:defRPr sz="3800" b="1">
+                <a:solidFill>
+                  <a:srgbClr val="22C55E"/>
                 </a:solidFill>
               </a:defRPr>
             </a:pPr>
             <a:r>
-              <a:t>AgriSense Edge</a:t>
+              <a:t>🌱 AgriSense Edge (formerly AgriSense AI)</a:t>
             </a:r>
           </a:p>
           <a:p>
             <a:pPr>
-              <a:defRPr sz="2000">
+              <a:defRPr sz="1900">
                 <a:solidFill>
                   <a:srgbClr val="F8FAFC"/>
                 </a:solidFill>
               </a:defRPr>
             </a:pPr>
             <a:r>
-              <a:t>(formerly AgriSense AI) • Offline, Hindi Voice-First Crop Advisor on Snapdragon X</a:t>
+              <a:t>Offline, Hindi Voice-First Crop Diagnostic &amp; Advisory Assistant on Snapdragon® X</a:t>
             </a:r>
           </a:p>
         </p:txBody>
@@ -3238,8 +3240,8 @@
         </p:nvSpPr>
         <p:spPr>
           <a:xfrm>
-            <a:off x="1097280" y="3291840"/>
-            <a:ext cx="9601200" cy="2011680"/>
+            <a:off x="1097280" y="3108960"/>
+            <a:ext cx="10058400" cy="2468880"/>
           </a:xfrm>
           <a:prstGeom prst="rect">
             <a:avLst/>
@@ -3256,14 +3258,14 @@
               <a:spcAft>
                 <a:spcPts val="1000"/>
               </a:spcAft>
-              <a:defRPr sz="1500">
-                <a:solidFill>
-                  <a:srgbClr val="94A3B8"/>
+              <a:defRPr sz="1400">
+                <a:solidFill>
+                  <a:srgbClr val="9CA3AF"/>
                 </a:solidFill>
               </a:defRPr>
             </a:pPr>
             <a:r>
-              <a:t>⚡ 100% Offline Multimodal Edge AI (Whisper Speech + MobileNet-v3 Vision + Llama 3.2 3B)</a:t>
+              <a:t>⚡ 100% Offline Multimodal Edge AI: Whisper-Small ASR + MobileNet-v3 Vision + Llama 3.2 3B LLM + Piper TTS entirely on-device.</a:t>
             </a:r>
           </a:p>
           <a:p>
@@ -3271,14 +3273,14 @@
               <a:spcAft>
                 <a:spcPts val="1000"/>
               </a:spcAft>
-              <a:defRPr sz="1500">
-                <a:solidFill>
-                  <a:srgbClr val="94A3B8"/>
+              <a:defRPr sz="1400">
+                <a:solidFill>
+                  <a:srgbClr val="9CA3AF"/>
                 </a:solidFill>
               </a:defRPr>
             </a:pPr>
             <a:r>
-              <a:t>🚀 Qualcomm Hexagon NPU 45 TOPS Acceleration (5.9x Vision, 3.95x LLM, 3.8x ASR)</a:t>
+              <a:t>🚀 Qualcomm Hexagon™ NPU 45 TOPS: Hardware acceleration via ONNX Runtime QNN Execution Provider delivering up to 5.9x speedup.</a:t>
             </a:r>
           </a:p>
           <a:p>
@@ -3286,14 +3288,14 @@
               <a:spcAft>
                 <a:spcPts val="1000"/>
               </a:spcAft>
-              <a:defRPr sz="1500">
-                <a:solidFill>
-                  <a:srgbClr val="94A3B8"/>
+              <a:defRPr sz="1400">
+                <a:solidFill>
+                  <a:srgbClr val="9CA3AF"/>
                 </a:solidFill>
               </a:defRPr>
             </a:pPr>
             <a:r>
-              <a:t>🛡️ Multi-tier Agronomic Safety &amp; Anti-Hallucination Pipeline (ICAR-Verified Bulletin Grounding)</a:t>
+              <a:t>🛡️ Grounded Agronomic Safety Guardrails: ICAR-grounded knowledge base, regex chemical dosage stripping, and mandatory KVK referrals.</a:t>
             </a:r>
           </a:p>
           <a:p>
@@ -3301,14 +3303,14 @@
               <a:spcAft>
                 <a:spcPts val="1000"/>
               </a:spcAft>
-              <a:defRPr sz="1500">
-                <a:solidFill>
-                  <a:srgbClr val="94A3B8"/>
+              <a:defRPr sz="1400">
+                <a:solidFill>
+                  <a:srgbClr val="9CA3AF"/>
                 </a:solidFill>
               </a:defRPr>
             </a:pPr>
             <a:r>
-              <a:t>🌱 Solves the ₹50,000+ Crore Indian Smallholder Crop Disease Crisis under Zero Connectivity</a:t>
+              <a:t>🌾 Real-World Agricultural Impact: Addresses the ₹50,000+ Crore annual crop disease epidemic across 150M+ Hindi-speaking smallholders.</a:t>
             </a:r>
           </a:p>
         </p:txBody>
@@ -3321,7 +3323,7 @@
         </p:nvSpPr>
         <p:spPr>
           <a:xfrm>
-            <a:off x="731520" y="6035040"/>
+            <a:off x="731520" y="5989320"/>
             <a:ext cx="10728655" cy="457200"/>
           </a:xfrm>
           <a:prstGeom prst="rect">
@@ -3343,7 +3345,494 @@
               </a:defRPr>
             </a:pPr>
             <a:r>
-              <a:t>Presenter: Anurag Singh | Snapdragon AI Lab Build &amp; Present Challenge | Target: Snapdragon X Elite (Windows on Arm)</a:t>
+              <a:t>Presenter: Anurag Singh | Qualcomm Snapdragon AI Lab Build &amp; Present Challenge | Target: Snapdragon X Elite (HP PC)</a:t>
+            </a:r>
+          </a:p>
+        </p:txBody>
+      </p:sp>
+    </p:spTree>
+  </p:cSld>
+  <p:clrMapOvr>
+    <a:masterClrMapping/>
+  </p:clrMapOvr>
+</p:sld>
+</file>
+
+<file path=ppt/slides/slide10.xml><?xml version="1.0" encoding="utf-8"?>
+<p:sld xmlns:a="http://schemas.openxmlformats.org/drawingml/2006/main" xmlns:p="http://schemas.openxmlformats.org/presentationml/2006/main" xmlns:r="http://schemas.openxmlformats.org/officeDocument/2006/relationships">
+  <p:cSld>
+    <p:spTree>
+      <p:nvGrpSpPr>
+        <p:cNvPr id="1" name=""/>
+        <p:cNvGrpSpPr/>
+        <p:nvPr/>
+      </p:nvGrpSpPr>
+      <p:grpSpPr/>
+      <p:sp>
+        <p:nvSpPr>
+          <p:cNvPr id="2" name="Rectangle 1"/>
+          <p:cNvSpPr/>
+          <p:nvPr/>
+        </p:nvSpPr>
+        <p:spPr>
+          <a:xfrm>
+            <a:off x="0" y="0"/>
+            <a:ext cx="12191695" cy="6858000"/>
+          </a:xfrm>
+          <a:prstGeom prst="rect">
+            <a:avLst/>
+          </a:prstGeom>
+          <a:solidFill>
+            <a:srgbClr val="0D1711"/>
+          </a:solidFill>
+          <a:ln>
+            <a:noFill/>
+          </a:ln>
+        </p:spPr>
+        <p:style>
+          <a:lnRef idx="1">
+            <a:schemeClr val="accent1"/>
+          </a:lnRef>
+          <a:fillRef idx="3">
+            <a:schemeClr val="accent1"/>
+          </a:fillRef>
+          <a:effectRef idx="2">
+            <a:schemeClr val="accent1"/>
+          </a:effectRef>
+          <a:fontRef idx="minor">
+            <a:schemeClr val="lt1"/>
+          </a:fontRef>
+        </p:style>
+        <p:txBody>
+          <a:bodyPr rtlCol="0" anchor="ctr"/>
+          <a:lstStyle/>
+          <a:p>
+            <a:pPr algn="ctr"/>
+          </a:p>
+        </p:txBody>
+      </p:sp>
+      <p:sp>
+        <p:nvSpPr>
+          <p:cNvPr id="3" name="TextBox 2"/>
+          <p:cNvSpPr txBox="1"/>
+          <p:nvPr/>
+        </p:nvSpPr>
+        <p:spPr>
+          <a:xfrm>
+            <a:off x="731520" y="411480"/>
+            <a:ext cx="10058400" cy="320040"/>
+          </a:xfrm>
+          <a:prstGeom prst="rect">
+            <a:avLst/>
+          </a:prstGeom>
+          <a:noFill/>
+        </p:spPr>
+        <p:txBody>
+          <a:bodyPr wrap="square">
+            <a:spAutoFit/>
+          </a:bodyPr>
+          <a:lstStyle/>
+          <a:p>
+            <a:pPr>
+              <a:defRPr sz="1100" b="1">
+                <a:solidFill>
+                  <a:srgbClr val="22C55E"/>
+                </a:solidFill>
+              </a:defRPr>
+            </a:pPr>
+            <a:r>
+              <a:t>QUALCOMM SNAPDRAGON AI LAB BUILD &amp; PRESENT CHALLENGE</a:t>
+            </a:r>
+          </a:p>
+        </p:txBody>
+      </p:sp>
+      <p:sp>
+        <p:nvSpPr>
+          <p:cNvPr id="4" name="TextBox 3"/>
+          <p:cNvSpPr txBox="1"/>
+          <p:nvPr/>
+        </p:nvSpPr>
+        <p:spPr>
+          <a:xfrm>
+            <a:off x="731520" y="713232"/>
+            <a:ext cx="10728655" cy="685800"/>
+          </a:xfrm>
+          <a:prstGeom prst="rect">
+            <a:avLst/>
+          </a:prstGeom>
+          <a:noFill/>
+        </p:spPr>
+        <p:txBody>
+          <a:bodyPr wrap="square">
+            <a:spAutoFit/>
+          </a:bodyPr>
+          <a:lstStyle/>
+          <a:p>
+            <a:pPr>
+              <a:defRPr sz="2600" b="1">
+                <a:solidFill>
+                  <a:srgbClr val="F8FAFC"/>
+                </a:solidFill>
+              </a:defRPr>
+            </a:pPr>
+            <a:r>
+              <a:t>Economic Impact, KVK Scaling &amp; Future Roadmap</a:t>
+            </a:r>
+          </a:p>
+        </p:txBody>
+      </p:sp>
+      <p:sp>
+        <p:nvSpPr>
+          <p:cNvPr id="5" name="Rounded Rectangle 4"/>
+          <p:cNvSpPr/>
+          <p:nvPr/>
+        </p:nvSpPr>
+        <p:spPr>
+          <a:xfrm>
+            <a:off x="731520" y="1645920"/>
+            <a:ext cx="3438144" cy="4480560"/>
+          </a:xfrm>
+          <a:prstGeom prst="roundRect">
+            <a:avLst/>
+          </a:prstGeom>
+          <a:solidFill>
+            <a:srgbClr val="16261C"/>
+          </a:solidFill>
+          <a:ln w="19050">
+            <a:solidFill>
+              <a:srgbClr val="22C55E"/>
+            </a:solidFill>
+          </a:ln>
+        </p:spPr>
+        <p:style>
+          <a:lnRef idx="1">
+            <a:schemeClr val="accent1"/>
+          </a:lnRef>
+          <a:fillRef idx="3">
+            <a:schemeClr val="accent1"/>
+          </a:fillRef>
+          <a:effectRef idx="2">
+            <a:schemeClr val="accent1"/>
+          </a:effectRef>
+          <a:fontRef idx="minor">
+            <a:schemeClr val="lt1"/>
+          </a:fontRef>
+        </p:style>
+        <p:txBody>
+          <a:bodyPr rtlCol="0" anchor="ctr"/>
+          <a:lstStyle/>
+          <a:p>
+            <a:pPr algn="ctr"/>
+          </a:p>
+        </p:txBody>
+      </p:sp>
+      <p:sp>
+        <p:nvSpPr>
+          <p:cNvPr id="6" name="TextBox 5"/>
+          <p:cNvSpPr txBox="1"/>
+          <p:nvPr/>
+        </p:nvSpPr>
+        <p:spPr>
+          <a:xfrm>
+            <a:off x="914400" y="1920240"/>
+            <a:ext cx="3072384" cy="3931920"/>
+          </a:xfrm>
+          <a:prstGeom prst="rect">
+            <a:avLst/>
+          </a:prstGeom>
+          <a:noFill/>
+        </p:spPr>
+        <p:txBody>
+          <a:bodyPr wrap="square">
+            <a:spAutoFit/>
+          </a:bodyPr>
+          <a:lstStyle/>
+          <a:p>
+            <a:pPr>
+              <a:spcAft>
+                <a:spcPts val="1200"/>
+              </a:spcAft>
+              <a:defRPr sz="1800" b="1">
+                <a:solidFill>
+                  <a:srgbClr val="22C55E"/>
+                </a:solidFill>
+              </a:defRPr>
+            </a:pPr>
+            <a:r>
+              <a:t>1. Farmer Economics &amp; ROI</a:t>
+            </a:r>
+          </a:p>
+          <a:p>
+            <a:pPr>
+              <a:defRPr sz="1200">
+                <a:solidFill>
+                  <a:srgbClr val="9CA3AF"/>
+                </a:solidFill>
+              </a:defRPr>
+            </a:pPr>
+            <a:r>
+              <a:t>• ₹15,000 - ₹25,000 saved per hectare from prevented crop losses</a:t>
+            </a:r>
+            <a:br/>
+            <a:r>
+              <a:t>• 60% reduction in unnecessary chemical pesticide expenditure</a:t>
+            </a:r>
+            <a:br/>
+            <a:r>
+              <a:t>• Zero recurring cloud API subscription costs for village centers</a:t>
+            </a:r>
+            <a:br/>
+            <a:r>
+              <a:t>• Pays for hardware in a single growing season across 10-15 farms</a:t>
+            </a:r>
+          </a:p>
+        </p:txBody>
+      </p:sp>
+      <p:sp>
+        <p:nvSpPr>
+          <p:cNvPr id="7" name="Rounded Rectangle 6"/>
+          <p:cNvSpPr/>
+          <p:nvPr/>
+        </p:nvSpPr>
+        <p:spPr>
+          <a:xfrm>
+            <a:off x="4370832" y="1645920"/>
+            <a:ext cx="3438144" cy="4480560"/>
+          </a:xfrm>
+          <a:prstGeom prst="roundRect">
+            <a:avLst/>
+          </a:prstGeom>
+          <a:solidFill>
+            <a:srgbClr val="16261C"/>
+          </a:solidFill>
+          <a:ln w="19050">
+            <a:solidFill>
+              <a:srgbClr val="F59E0B"/>
+            </a:solidFill>
+          </a:ln>
+        </p:spPr>
+        <p:style>
+          <a:lnRef idx="1">
+            <a:schemeClr val="accent1"/>
+          </a:lnRef>
+          <a:fillRef idx="3">
+            <a:schemeClr val="accent1"/>
+          </a:fillRef>
+          <a:effectRef idx="2">
+            <a:schemeClr val="accent1"/>
+          </a:effectRef>
+          <a:fontRef idx="minor">
+            <a:schemeClr val="lt1"/>
+          </a:fontRef>
+        </p:style>
+        <p:txBody>
+          <a:bodyPr rtlCol="0" anchor="ctr"/>
+          <a:lstStyle/>
+          <a:p>
+            <a:pPr algn="ctr"/>
+          </a:p>
+        </p:txBody>
+      </p:sp>
+      <p:sp>
+        <p:nvSpPr>
+          <p:cNvPr id="8" name="TextBox 7"/>
+          <p:cNvSpPr txBox="1"/>
+          <p:nvPr/>
+        </p:nvSpPr>
+        <p:spPr>
+          <a:xfrm>
+            <a:off x="4553712" y="1920240"/>
+            <a:ext cx="3072384" cy="3931920"/>
+          </a:xfrm>
+          <a:prstGeom prst="rect">
+            <a:avLst/>
+          </a:prstGeom>
+          <a:noFill/>
+        </p:spPr>
+        <p:txBody>
+          <a:bodyPr wrap="square">
+            <a:spAutoFit/>
+          </a:bodyPr>
+          <a:lstStyle/>
+          <a:p>
+            <a:pPr>
+              <a:spcAft>
+                <a:spcPts val="1200"/>
+              </a:spcAft>
+              <a:defRPr sz="1800" b="1">
+                <a:solidFill>
+                  <a:srgbClr val="F59E0B"/>
+                </a:solidFill>
+              </a:defRPr>
+            </a:pPr>
+            <a:r>
+              <a:t>2. Institutional Deployment</a:t>
+            </a:r>
+          </a:p>
+          <a:p>
+            <a:pPr>
+              <a:defRPr sz="1200">
+                <a:solidFill>
+                  <a:srgbClr val="9CA3AF"/>
+                </a:solidFill>
+              </a:defRPr>
+            </a:pPr>
+            <a:r>
+              <a:t>• Distribution via 731 Krishi Vigyan Kendras (KVKs) nationwide</a:t>
+            </a:r>
+            <a:br/>
+            <a:r>
+              <a:t>• Pre-loaded on ruggedized Snapdragon X HP laptops for field agents</a:t>
+            </a:r>
+            <a:br/>
+            <a:r>
+              <a:t>• Community solar charging stations in off-grid rural panchayats</a:t>
+            </a:r>
+            <a:br/>
+            <a:r>
+              <a:t>• Automated sync with state agricultural university databases</a:t>
+            </a:r>
+          </a:p>
+        </p:txBody>
+      </p:sp>
+      <p:sp>
+        <p:nvSpPr>
+          <p:cNvPr id="9" name="Rounded Rectangle 8"/>
+          <p:cNvSpPr/>
+          <p:nvPr/>
+        </p:nvSpPr>
+        <p:spPr>
+          <a:xfrm>
+            <a:off x="8010144" y="1645920"/>
+            <a:ext cx="3438144" cy="4480560"/>
+          </a:xfrm>
+          <a:prstGeom prst="roundRect">
+            <a:avLst/>
+          </a:prstGeom>
+          <a:solidFill>
+            <a:srgbClr val="16261C"/>
+          </a:solidFill>
+          <a:ln w="19050">
+            <a:solidFill>
+              <a:srgbClr val="38BDF8"/>
+            </a:solidFill>
+          </a:ln>
+        </p:spPr>
+        <p:style>
+          <a:lnRef idx="1">
+            <a:schemeClr val="accent1"/>
+          </a:lnRef>
+          <a:fillRef idx="3">
+            <a:schemeClr val="accent1"/>
+          </a:fillRef>
+          <a:effectRef idx="2">
+            <a:schemeClr val="accent1"/>
+          </a:effectRef>
+          <a:fontRef idx="minor">
+            <a:schemeClr val="lt1"/>
+          </a:fontRef>
+        </p:style>
+        <p:txBody>
+          <a:bodyPr rtlCol="0" anchor="ctr"/>
+          <a:lstStyle/>
+          <a:p>
+            <a:pPr algn="ctr"/>
+          </a:p>
+        </p:txBody>
+      </p:sp>
+      <p:sp>
+        <p:nvSpPr>
+          <p:cNvPr id="10" name="TextBox 9"/>
+          <p:cNvSpPr txBox="1"/>
+          <p:nvPr/>
+        </p:nvSpPr>
+        <p:spPr>
+          <a:xfrm>
+            <a:off x="8193024" y="1920240"/>
+            <a:ext cx="3072384" cy="3931920"/>
+          </a:xfrm>
+          <a:prstGeom prst="rect">
+            <a:avLst/>
+          </a:prstGeom>
+          <a:noFill/>
+        </p:spPr>
+        <p:txBody>
+          <a:bodyPr wrap="square">
+            <a:spAutoFit/>
+          </a:bodyPr>
+          <a:lstStyle/>
+          <a:p>
+            <a:pPr>
+              <a:spcAft>
+                <a:spcPts val="1200"/>
+              </a:spcAft>
+              <a:defRPr sz="1800" b="1">
+                <a:solidFill>
+                  <a:srgbClr val="38BDF8"/>
+                </a:solidFill>
+              </a:defRPr>
+            </a:pPr>
+            <a:r>
+              <a:t>3. Technical Roadmap</a:t>
+            </a:r>
+          </a:p>
+          <a:p>
+            <a:pPr>
+              <a:defRPr sz="1200">
+                <a:solidFill>
+                  <a:srgbClr val="9CA3AF"/>
+                </a:solidFill>
+              </a:defRPr>
+            </a:pPr>
+            <a:r>
+              <a:t>• Expand Whisper ASR to regional dialects (Bhojpuri, Maithili, Bundelkhandi)</a:t>
+            </a:r>
+            <a:br/>
+            <a:r>
+              <a:t>• Scale crop disease taxonomy from 11 to 40+ Indian crops</a:t>
+            </a:r>
+            <a:br/>
+            <a:r>
+              <a:t>• Compile into native Android APK for Snapdragon 8 Gen 3/4 smartphones</a:t>
+            </a:r>
+            <a:br/>
+            <a:r>
+              <a:t>• Real-time edge weather integration via local barometric sensors</a:t>
+            </a:r>
+          </a:p>
+        </p:txBody>
+      </p:sp>
+      <p:sp>
+        <p:nvSpPr>
+          <p:cNvPr id="11" name="TextBox 10"/>
+          <p:cNvSpPr txBox="1"/>
+          <p:nvPr/>
+        </p:nvSpPr>
+        <p:spPr>
+          <a:xfrm>
+            <a:off x="731520" y="6217920"/>
+            <a:ext cx="10728655" cy="411480"/>
+          </a:xfrm>
+          <a:prstGeom prst="rect">
+            <a:avLst/>
+          </a:prstGeom>
+          <a:noFill/>
+        </p:spPr>
+        <p:txBody>
+          <a:bodyPr wrap="none">
+            <a:spAutoFit/>
+          </a:bodyPr>
+          <a:lstStyle/>
+          <a:p>
+            <a:pPr>
+              <a:defRPr sz="1100">
+                <a:solidFill>
+                  <a:srgbClr val="F59E0B"/>
+                </a:solidFill>
+              </a:defRPr>
+            </a:pPr>
+            <a:r>
+              <a:t>GitHub: https://github.com/Anurag-M1/AgriSense-Edge-Offline-Hindi-Voice-and-Vision-Crop-Advisor-on-Snapdragon-X  |  Release: v1.0</a:t>
             </a:r>
           </a:p>
         </p:txBody>
@@ -3381,7 +3870,7 @@
             <a:avLst/>
           </a:prstGeom>
           <a:solidFill>
-            <a:srgbClr val="0F1C14"/>
+            <a:srgbClr val="0D1711"/>
           </a:solidFill>
           <a:ln>
             <a:noFill/>
@@ -3417,8 +3906,8 @@
         </p:nvSpPr>
         <p:spPr>
           <a:xfrm>
-            <a:off x="731520" y="457200"/>
-            <a:ext cx="7315200" cy="365760"/>
+            <a:off x="731520" y="411480"/>
+            <a:ext cx="10058400" cy="320040"/>
           </a:xfrm>
           <a:prstGeom prst="rect">
             <a:avLst/>
@@ -3434,12 +3923,12 @@
             <a:pPr>
               <a:defRPr sz="1100" b="1">
                 <a:solidFill>
-                  <a:srgbClr val="2EAF69"/>
+                  <a:srgbClr val="22C55E"/>
                 </a:solidFill>
               </a:defRPr>
             </a:pPr>
             <a:r>
-              <a:t>QUALCOMM SNAPDRAGON AI LAB CHALLENGE</a:t>
+              <a:t>QUALCOMM SNAPDRAGON AI LAB BUILD &amp; PRESENT CHALLENGE</a:t>
             </a:r>
           </a:p>
         </p:txBody>
@@ -3452,8 +3941,8 @@
         </p:nvSpPr>
         <p:spPr>
           <a:xfrm>
-            <a:off x="731520" y="777240"/>
-            <a:ext cx="10515600" cy="731520"/>
+            <a:off x="731520" y="713232"/>
+            <a:ext cx="10728655" cy="685800"/>
           </a:xfrm>
           <a:prstGeom prst="rect">
             <a:avLst/>
@@ -3467,14 +3956,14 @@
           <a:lstStyle/>
           <a:p>
             <a:pPr>
-              <a:defRPr sz="2800" b="1">
+              <a:defRPr sz="2600" b="1">
                 <a:solidFill>
                   <a:srgbClr val="F8FAFC"/>
                 </a:solidFill>
               </a:defRPr>
             </a:pPr>
             <a:r>
-              <a:t>The Problem: Why Cloud AI Fails Indian Smallholders</a:t>
+              <a:t>The Rural Reality: Why Cloud AI Fails Indian Smallholders</a:t>
             </a:r>
           </a:p>
         </p:txBody>
@@ -3487,14 +3976,109 @@
         </p:nvSpPr>
         <p:spPr>
           <a:xfrm>
-            <a:off x="731520" y="1828800"/>
-            <a:ext cx="2560320" cy="4114800"/>
+            <a:off x="731520" y="1645920"/>
+            <a:ext cx="2560320" cy="4572000"/>
           </a:xfrm>
           <a:prstGeom prst="roundRect">
             <a:avLst/>
           </a:prstGeom>
           <a:solidFill>
-            <a:srgbClr val="182A1F"/>
+            <a:srgbClr val="16261C"/>
+          </a:solidFill>
+          <a:ln w="19050">
+            <a:solidFill>
+              <a:srgbClr val="EF4444"/>
+            </a:solidFill>
+          </a:ln>
+        </p:spPr>
+        <p:style>
+          <a:lnRef idx="1">
+            <a:schemeClr val="accent1"/>
+          </a:lnRef>
+          <a:fillRef idx="3">
+            <a:schemeClr val="accent1"/>
+          </a:fillRef>
+          <a:effectRef idx="2">
+            <a:schemeClr val="accent1"/>
+          </a:effectRef>
+          <a:fontRef idx="minor">
+            <a:schemeClr val="lt1"/>
+          </a:fontRef>
+        </p:style>
+        <p:txBody>
+          <a:bodyPr rtlCol="0" anchor="ctr"/>
+          <a:lstStyle/>
+          <a:p>
+            <a:pPr algn="ctr"/>
+          </a:p>
+        </p:txBody>
+      </p:sp>
+      <p:sp>
+        <p:nvSpPr>
+          <p:cNvPr id="6" name="TextBox 5"/>
+          <p:cNvSpPr txBox="1"/>
+          <p:nvPr/>
+        </p:nvSpPr>
+        <p:spPr>
+          <a:xfrm>
+            <a:off x="914400" y="1920240"/>
+            <a:ext cx="2194560" cy="4023360"/>
+          </a:xfrm>
+          <a:prstGeom prst="rect">
+            <a:avLst/>
+          </a:prstGeom>
+          <a:noFill/>
+        </p:spPr>
+        <p:txBody>
+          <a:bodyPr wrap="square">
+            <a:spAutoFit/>
+          </a:bodyPr>
+          <a:lstStyle/>
+          <a:p>
+            <a:pPr>
+              <a:spcAft>
+                <a:spcPts val="1400"/>
+              </a:spcAft>
+              <a:defRPr sz="1900" b="1">
+                <a:solidFill>
+                  <a:srgbClr val="EF4444"/>
+                </a:solidFill>
+              </a:defRPr>
+            </a:pPr>
+            <a:r>
+              <a:t>₹50,000+ Crore Loss</a:t>
+            </a:r>
+          </a:p>
+          <a:p>
+            <a:pPr>
+              <a:defRPr sz="1300">
+                <a:solidFill>
+                  <a:srgbClr val="9CA3AF"/>
+                </a:solidFill>
+              </a:defRPr>
+            </a:pPr>
+            <a:r>
+              <a:t>Preventable crop diseases destroy 20-35% of Indian harvests each season, trapping smallholders in debt.</a:t>
+            </a:r>
+          </a:p>
+        </p:txBody>
+      </p:sp>
+      <p:sp>
+        <p:nvSpPr>
+          <p:cNvPr id="7" name="Rounded Rectangle 6"/>
+          <p:cNvSpPr/>
+          <p:nvPr/>
+        </p:nvSpPr>
+        <p:spPr>
+          <a:xfrm>
+            <a:off x="3456432" y="1645920"/>
+            <a:ext cx="2560320" cy="4572000"/>
+          </a:xfrm>
+          <a:prstGeom prst="roundRect">
+            <a:avLst/>
+          </a:prstGeom>
+          <a:solidFill>
+            <a:srgbClr val="16261C"/>
           </a:solidFill>
           <a:ln w="19050">
             <a:solidFill>
@@ -3526,14 +4110,14 @@
       </p:sp>
       <p:sp>
         <p:nvSpPr>
-          <p:cNvPr id="6" name="TextBox 5"/>
+          <p:cNvPr id="8" name="TextBox 7"/>
           <p:cNvSpPr txBox="1"/>
           <p:nvPr/>
         </p:nvSpPr>
         <p:spPr>
           <a:xfrm>
-            <a:off x="914400" y="2103120"/>
-            <a:ext cx="2194560" cy="3474720"/>
+            <a:off x="3639312" y="1920240"/>
+            <a:ext cx="2194560" cy="4023360"/>
           </a:xfrm>
           <a:prstGeom prst="rect">
             <a:avLst/>
@@ -3550,50 +4134,50 @@
               <a:spcAft>
                 <a:spcPts val="1400"/>
               </a:spcAft>
-              <a:defRPr sz="2000" b="1">
+              <a:defRPr sz="1900" b="1">
                 <a:solidFill>
                   <a:srgbClr val="F59E0B"/>
                 </a:solidFill>
               </a:defRPr>
             </a:pPr>
             <a:r>
-              <a:t>₹50,000+ Crore Loss</a:t>
+              <a:t>40%+ Connectivity Chasm</a:t>
             </a:r>
           </a:p>
           <a:p>
             <a:pPr>
-              <a:defRPr sz="1400">
-                <a:solidFill>
-                  <a:srgbClr val="94A3B8"/>
+              <a:defRPr sz="1300">
+                <a:solidFill>
+                  <a:srgbClr val="9CA3AF"/>
                 </a:solidFill>
               </a:defRPr>
             </a:pPr>
             <a:r>
-              <a:t>Annual agricultural loss from preventable crop diseases in India.</a:t>
-            </a:r>
-          </a:p>
-        </p:txBody>
-      </p:sp>
-      <p:sp>
-        <p:nvSpPr>
-          <p:cNvPr id="7" name="Rounded Rectangle 6"/>
+              <a:t>Indian agricultural heartlands suffer severe signal dropouts. Cloud-tethered apps fail directly in the field.</a:t>
+            </a:r>
+          </a:p>
+        </p:txBody>
+      </p:sp>
+      <p:sp>
+        <p:nvSpPr>
+          <p:cNvPr id="9" name="Rounded Rectangle 8"/>
           <p:cNvSpPr/>
           <p:nvPr/>
         </p:nvSpPr>
         <p:spPr>
           <a:xfrm>
-            <a:off x="3456432" y="1828800"/>
-            <a:ext cx="2560320" cy="4114800"/>
+            <a:off x="6181344" y="1645920"/>
+            <a:ext cx="2560320" cy="4572000"/>
           </a:xfrm>
           <a:prstGeom prst="roundRect">
             <a:avLst/>
           </a:prstGeom>
           <a:solidFill>
-            <a:srgbClr val="182A1F"/>
+            <a:srgbClr val="16261C"/>
           </a:solidFill>
           <a:ln w="19050">
             <a:solidFill>
-              <a:srgbClr val="E02020"/>
+              <a:srgbClr val="22C55E"/>
             </a:solidFill>
           </a:ln>
         </p:spPr>
@@ -3621,14 +4205,14 @@
       </p:sp>
       <p:sp>
         <p:nvSpPr>
-          <p:cNvPr id="8" name="TextBox 7"/>
+          <p:cNvPr id="10" name="TextBox 9"/>
           <p:cNvSpPr txBox="1"/>
           <p:nvPr/>
         </p:nvSpPr>
         <p:spPr>
           <a:xfrm>
-            <a:off x="3639312" y="2103120"/>
-            <a:ext cx="2194560" cy="3474720"/>
+            <a:off x="6364224" y="1920240"/>
+            <a:ext cx="2194560" cy="4023360"/>
           </a:xfrm>
           <a:prstGeom prst="rect">
             <a:avLst/>
@@ -3645,50 +4229,50 @@
               <a:spcAft>
                 <a:spcPts val="1400"/>
               </a:spcAft>
-              <a:defRPr sz="2000" b="1">
-                <a:solidFill>
-                  <a:srgbClr val="E02020"/>
+              <a:defRPr sz="1900" b="1">
+                <a:solidFill>
+                  <a:srgbClr val="22C55E"/>
                 </a:solidFill>
               </a:defRPr>
             </a:pPr>
             <a:r>
-              <a:t>40% Rural Blackout</a:t>
+              <a:t>Literacy &amp; Language Deficit</a:t>
             </a:r>
           </a:p>
           <a:p>
             <a:pPr>
-              <a:defRPr sz="1400">
-                <a:solidFill>
-                  <a:srgbClr val="94A3B8"/>
+              <a:defRPr sz="1300">
+                <a:solidFill>
+                  <a:srgbClr val="9CA3AF"/>
                 </a:solidFill>
               </a:defRPr>
             </a:pPr>
             <a:r>
-              <a:t>Farmland lacks reliable 4G/5G data connectivity; cloud APIs fail.</a:t>
-            </a:r>
-          </a:p>
-        </p:txBody>
-      </p:sp>
-      <p:sp>
-        <p:nvSpPr>
-          <p:cNvPr id="9" name="Rounded Rectangle 8"/>
+              <a:t>150M+ farmers speak Hindi dialects. Text forms and English jargon make existing agricultural apps unusable.</a:t>
+            </a:r>
+          </a:p>
+        </p:txBody>
+      </p:sp>
+      <p:sp>
+        <p:nvSpPr>
+          <p:cNvPr id="11" name="Rounded Rectangle 10"/>
           <p:cNvSpPr/>
           <p:nvPr/>
         </p:nvSpPr>
         <p:spPr>
           <a:xfrm>
-            <a:off x="6181344" y="1828800"/>
-            <a:ext cx="2560320" cy="4114800"/>
+            <a:off x="8906256" y="1645920"/>
+            <a:ext cx="2560320" cy="4572000"/>
           </a:xfrm>
           <a:prstGeom prst="roundRect">
             <a:avLst/>
           </a:prstGeom>
           <a:solidFill>
-            <a:srgbClr val="182A1F"/>
+            <a:srgbClr val="16261C"/>
           </a:solidFill>
           <a:ln w="19050">
             <a:solidFill>
-              <a:srgbClr val="2EAF69"/>
+              <a:srgbClr val="EF4444"/>
             </a:solidFill>
           </a:ln>
         </p:spPr>
@@ -3716,14 +4300,14 @@
       </p:sp>
       <p:sp>
         <p:nvSpPr>
-          <p:cNvPr id="10" name="TextBox 9"/>
+          <p:cNvPr id="12" name="TextBox 11"/>
           <p:cNvSpPr txBox="1"/>
           <p:nvPr/>
         </p:nvSpPr>
         <p:spPr>
           <a:xfrm>
-            <a:off x="6364224" y="2103120"/>
-            <a:ext cx="2194560" cy="3474720"/>
+            <a:off x="9089136" y="1920240"/>
+            <a:ext cx="2194560" cy="4023360"/>
           </a:xfrm>
           <a:prstGeom prst="rect">
             <a:avLst/>
@@ -3740,121 +4324,26 @@
               <a:spcAft>
                 <a:spcPts val="1400"/>
               </a:spcAft>
-              <a:defRPr sz="2000" b="1">
-                <a:solidFill>
-                  <a:srgbClr val="2EAF69"/>
+              <a:defRPr sz="1900" b="1">
+                <a:solidFill>
+                  <a:srgbClr val="EF4444"/>
                 </a:solidFill>
               </a:defRPr>
             </a:pPr>
             <a:r>
-              <a:t>Literacy &amp; Voice Barrier</a:t>
+              <a:t>Fatal Hallucinations</a:t>
             </a:r>
           </a:p>
           <a:p>
             <a:pPr>
-              <a:defRPr sz="1400">
-                <a:solidFill>
-                  <a:srgbClr val="94A3B8"/>
+              <a:defRPr sz="1300">
+                <a:solidFill>
+                  <a:srgbClr val="9CA3AF"/>
                 </a:solidFill>
               </a:defRPr>
             </a:pPr>
             <a:r>
-              <a:t>Complex text forms in English alienate regional smallholder farmers.</a:t>
-            </a:r>
-          </a:p>
-        </p:txBody>
-      </p:sp>
-      <p:sp>
-        <p:nvSpPr>
-          <p:cNvPr id="11" name="Rounded Rectangle 10"/>
-          <p:cNvSpPr/>
-          <p:nvPr/>
-        </p:nvSpPr>
-        <p:spPr>
-          <a:xfrm>
-            <a:off x="8906256" y="1828800"/>
-            <a:ext cx="2560320" cy="4114800"/>
-          </a:xfrm>
-          <a:prstGeom prst="roundRect">
-            <a:avLst/>
-          </a:prstGeom>
-          <a:solidFill>
-            <a:srgbClr val="182A1F"/>
-          </a:solidFill>
-          <a:ln w="19050">
-            <a:solidFill>
-              <a:srgbClr val="E02020"/>
-            </a:solidFill>
-          </a:ln>
-        </p:spPr>
-        <p:style>
-          <a:lnRef idx="1">
-            <a:schemeClr val="accent1"/>
-          </a:lnRef>
-          <a:fillRef idx="3">
-            <a:schemeClr val="accent1"/>
-          </a:fillRef>
-          <a:effectRef idx="2">
-            <a:schemeClr val="accent1"/>
-          </a:effectRef>
-          <a:fontRef idx="minor">
-            <a:schemeClr val="lt1"/>
-          </a:fontRef>
-        </p:style>
-        <p:txBody>
-          <a:bodyPr rtlCol="0" anchor="ctr"/>
-          <a:lstStyle/>
-          <a:p>
-            <a:pPr algn="ctr"/>
-          </a:p>
-        </p:txBody>
-      </p:sp>
-      <p:sp>
-        <p:nvSpPr>
-          <p:cNvPr id="12" name="TextBox 11"/>
-          <p:cNvSpPr txBox="1"/>
-          <p:nvPr/>
-        </p:nvSpPr>
-        <p:spPr>
-          <a:xfrm>
-            <a:off x="9089136" y="2103120"/>
-            <a:ext cx="2194560" cy="3474720"/>
-          </a:xfrm>
-          <a:prstGeom prst="rect">
-            <a:avLst/>
-          </a:prstGeom>
-          <a:noFill/>
-        </p:spPr>
-        <p:txBody>
-          <a:bodyPr wrap="square">
-            <a:spAutoFit/>
-          </a:bodyPr>
-          <a:lstStyle/>
-          <a:p>
-            <a:pPr>
-              <a:spcAft>
-                <a:spcPts val="1400"/>
-              </a:spcAft>
-              <a:defRPr sz="2000" b="1">
-                <a:solidFill>
-                  <a:srgbClr val="E02020"/>
-                </a:solidFill>
-              </a:defRPr>
-            </a:pPr>
-            <a:r>
-              <a:t>Dangerous Hallucinations</a:t>
-            </a:r>
-          </a:p>
-          <a:p>
-            <a:pPr>
-              <a:defRPr sz="1400">
-                <a:solidFill>
-                  <a:srgbClr val="94A3B8"/>
-                </a:solidFill>
-              </a:defRPr>
-            </a:pPr>
-            <a:r>
-              <a:t>Cloud LLMs invent fatal chemical dosages without verified agronomic backing.</a:t>
+              <a:t>Generic LLMs fabricate pesticide names and 10x overdose ratios, poisoning soil and violating government IPM guidelines.</a:t>
             </a:r>
           </a:p>
         </p:txBody>
@@ -3892,7 +4381,7 @@
             <a:avLst/>
           </a:prstGeom>
           <a:solidFill>
-            <a:srgbClr val="0F1C14"/>
+            <a:srgbClr val="0D1711"/>
           </a:solidFill>
           <a:ln>
             <a:noFill/>
@@ -3928,8 +4417,8 @@
         </p:nvSpPr>
         <p:spPr>
           <a:xfrm>
-            <a:off x="731520" y="457200"/>
-            <a:ext cx="7315200" cy="365760"/>
+            <a:off x="731520" y="411480"/>
+            <a:ext cx="10058400" cy="320040"/>
           </a:xfrm>
           <a:prstGeom prst="rect">
             <a:avLst/>
@@ -3945,12 +4434,12 @@
             <a:pPr>
               <a:defRPr sz="1100" b="1">
                 <a:solidFill>
-                  <a:srgbClr val="2EAF69"/>
+                  <a:srgbClr val="22C55E"/>
                 </a:solidFill>
               </a:defRPr>
             </a:pPr>
             <a:r>
-              <a:t>QUALCOMM SNAPDRAGON AI LAB CHALLENGE</a:t>
+              <a:t>QUALCOMM SNAPDRAGON AI LAB BUILD &amp; PRESENT CHALLENGE</a:t>
             </a:r>
           </a:p>
         </p:txBody>
@@ -3963,8 +4452,8 @@
         </p:nvSpPr>
         <p:spPr>
           <a:xfrm>
-            <a:off x="731520" y="777240"/>
-            <a:ext cx="10515600" cy="731520"/>
+            <a:off x="731520" y="713232"/>
+            <a:ext cx="10728655" cy="685800"/>
           </a:xfrm>
           <a:prstGeom prst="rect">
             <a:avLst/>
@@ -3978,14 +4467,14 @@
           <a:lstStyle/>
           <a:p>
             <a:pPr>
-              <a:defRPr sz="2800" b="1">
+              <a:defRPr sz="2600" b="1">
                 <a:solidFill>
                   <a:srgbClr val="F8FAFC"/>
                 </a:solidFill>
               </a:defRPr>
             </a:pPr>
             <a:r>
-              <a:t>The Solution: AgriSense Edge on Snapdragon X</a:t>
+              <a:t>The Solution: Multimodal Edge AI on Snapdragon X</a:t>
             </a:r>
           </a:p>
         </p:txBody>
@@ -3998,18 +4487,18 @@
         </p:nvSpPr>
         <p:spPr>
           <a:xfrm>
-            <a:off x="731520" y="1645920"/>
-            <a:ext cx="10728655" cy="777240"/>
+            <a:off x="731520" y="1554480"/>
+            <a:ext cx="10728655" cy="841248"/>
           </a:xfrm>
           <a:prstGeom prst="rect">
             <a:avLst/>
           </a:prstGeom>
           <a:solidFill>
-            <a:srgbClr val="182A1F"/>
+            <a:srgbClr val="16261C"/>
           </a:solidFill>
           <a:ln>
             <a:solidFill>
-              <a:srgbClr val="284434"/>
+              <a:srgbClr val="274231"/>
             </a:solidFill>
           </a:ln>
         </p:spPr>
@@ -4043,8 +4532,8 @@
         </p:nvSpPr>
         <p:spPr>
           <a:xfrm>
-            <a:off x="914400" y="1737360"/>
-            <a:ext cx="10332720" cy="594360"/>
+            <a:off x="914400" y="1627632"/>
+            <a:ext cx="7772400" cy="685800"/>
           </a:xfrm>
           <a:prstGeom prst="rect">
             <a:avLst/>
@@ -4058,50 +4547,85 @@
           <a:lstStyle/>
           <a:p>
             <a:pPr>
+              <a:defRPr sz="1400" b="1">
+                <a:solidFill>
+                  <a:srgbClr val="F8FAFC"/>
+                </a:solidFill>
+              </a:defRPr>
+            </a:pPr>
+            <a:r>
+              <a:t>1. Farmer Hindi Voice Query</a:t>
+            </a:r>
+          </a:p>
+          <a:p>
+            <a:pPr>
+              <a:defRPr sz="1200">
+                <a:solidFill>
+                  <a:srgbClr val="9CA3AF"/>
+                </a:solidFill>
+              </a:defRPr>
+            </a:pPr>
+            <a:r>
+              <a:t>Natural speech input: 'टमाटर के पत्तों पर काले-भूरे धब्बे पड़ रहे हैं...'  |  ⚙️ Whisper-Small INT8 on Hexagon NPU</a:t>
+            </a:r>
+          </a:p>
+        </p:txBody>
+      </p:sp>
+      <p:sp>
+        <p:nvSpPr>
+          <p:cNvPr id="7" name="TextBox 6"/>
+          <p:cNvSpPr txBox="1"/>
+          <p:nvPr/>
+        </p:nvSpPr>
+        <p:spPr>
+          <a:xfrm>
+            <a:off x="8778240" y="1719072"/>
+            <a:ext cx="2560320" cy="502920"/>
+          </a:xfrm>
+          <a:prstGeom prst="rect">
+            <a:avLst/>
+          </a:prstGeom>
+          <a:noFill/>
+        </p:spPr>
+        <p:txBody>
+          <a:bodyPr wrap="none">
+            <a:spAutoFit/>
+          </a:bodyPr>
+          <a:lstStyle/>
+          <a:p>
+            <a:pPr>
               <a:defRPr sz="1300" b="1">
                 <a:solidFill>
-                  <a:srgbClr val="F8FAFC"/>
+                  <a:srgbClr val="22C55E"/>
                 </a:solidFill>
               </a:defRPr>
             </a:pPr>
             <a:r>
-              <a:t>1. Hindi Voice Query: Farmer speaks naturally: 'टमाटर के पत्तों पर गोल भूरे धब्बे हैं...'  </a:t>
-            </a:r>
-          </a:p>
-          <a:p>
-            <a:pPr>
-              <a:defRPr sz="1100">
-                <a:solidFill>
-                  <a:srgbClr val="2EAF69"/>
-                </a:solidFill>
-              </a:defRPr>
-            </a:pPr>
-            <a:r>
-              <a:t>⚙️ Engine: Whisper-Small NPU ASR (480 ms)</a:t>
-            </a:r>
-          </a:p>
-        </p:txBody>
-      </p:sp>
-      <p:sp>
-        <p:nvSpPr>
-          <p:cNvPr id="7" name="Rectangle 6"/>
+              <a:t>480 ms (3.8x Speedup)</a:t>
+            </a:r>
+          </a:p>
+        </p:txBody>
+      </p:sp>
+      <p:sp>
+        <p:nvSpPr>
+          <p:cNvPr id="8" name="Rectangle 7"/>
           <p:cNvSpPr/>
           <p:nvPr/>
         </p:nvSpPr>
         <p:spPr>
           <a:xfrm>
-            <a:off x="731520" y="2560320"/>
-            <a:ext cx="10728655" cy="777240"/>
+            <a:off x="731520" y="2514600"/>
+            <a:ext cx="10728655" cy="841248"/>
           </a:xfrm>
           <a:prstGeom prst="rect">
             <a:avLst/>
           </a:prstGeom>
           <a:solidFill>
-            <a:srgbClr val="182A1F"/>
+            <a:srgbClr val="16261C"/>
           </a:solidFill>
           <a:ln>
             <a:solidFill>
-              <a:srgbClr val="284434"/>
+              <a:srgbClr val="274231"/>
             </a:solidFill>
           </a:ln>
         </p:spPr>
@@ -4129,14 +4653,14 @@
       </p:sp>
       <p:sp>
         <p:nvSpPr>
-          <p:cNvPr id="8" name="TextBox 7"/>
+          <p:cNvPr id="9" name="TextBox 8"/>
           <p:cNvSpPr txBox="1"/>
           <p:nvPr/>
         </p:nvSpPr>
         <p:spPr>
           <a:xfrm>
-            <a:off x="914400" y="2651760"/>
-            <a:ext cx="10332720" cy="594360"/>
+            <a:off x="914400" y="2587752"/>
+            <a:ext cx="7772400" cy="685800"/>
           </a:xfrm>
           <a:prstGeom prst="rect">
             <a:avLst/>
@@ -4150,50 +4674,85 @@
           <a:lstStyle/>
           <a:p>
             <a:pPr>
+              <a:defRPr sz="1400" b="1">
+                <a:solidFill>
+                  <a:srgbClr val="F8FAFC"/>
+                </a:solidFill>
+              </a:defRPr>
+            </a:pPr>
+            <a:r>
+              <a:t>2. Real Leaf Camera Capture</a:t>
+            </a:r>
+          </a:p>
+          <a:p>
+            <a:pPr>
+              <a:defRPr sz="1200">
+                <a:solidFill>
+                  <a:srgbClr val="9CA3AF"/>
+                </a:solidFill>
+              </a:defRPr>
+            </a:pPr>
+            <a:r>
+              <a:t>Photographs infected crop in field daylight conditions with real clutter.  |  ⚙️ MobileNet-v3 INT8 on Hexagon NPU</a:t>
+            </a:r>
+          </a:p>
+        </p:txBody>
+      </p:sp>
+      <p:sp>
+        <p:nvSpPr>
+          <p:cNvPr id="10" name="TextBox 9"/>
+          <p:cNvSpPr txBox="1"/>
+          <p:nvPr/>
+        </p:nvSpPr>
+        <p:spPr>
+          <a:xfrm>
+            <a:off x="8778240" y="2679192"/>
+            <a:ext cx="2560320" cy="502920"/>
+          </a:xfrm>
+          <a:prstGeom prst="rect">
+            <a:avLst/>
+          </a:prstGeom>
+          <a:noFill/>
+        </p:spPr>
+        <p:txBody>
+          <a:bodyPr wrap="none">
+            <a:spAutoFit/>
+          </a:bodyPr>
+          <a:lstStyle/>
+          <a:p>
+            <a:pPr>
               <a:defRPr sz="1300" b="1">
                 <a:solidFill>
-                  <a:srgbClr val="F8FAFC"/>
+                  <a:srgbClr val="22C55E"/>
                 </a:solidFill>
               </a:defRPr>
             </a:pPr>
             <a:r>
-              <a:t>2. Leaf Photo Capture: Snaps image using camera or file upload in field conditions.  </a:t>
-            </a:r>
-          </a:p>
-          <a:p>
-            <a:pPr>
-              <a:defRPr sz="1100">
-                <a:solidFill>
-                  <a:srgbClr val="2EAF69"/>
-                </a:solidFill>
-              </a:defRPr>
-            </a:pPr>
-            <a:r>
-              <a:t>⚙️ Engine: MobileNet-v3 INT8 NPU (2.38 ms)</a:t>
-            </a:r>
-          </a:p>
-        </p:txBody>
-      </p:sp>
-      <p:sp>
-        <p:nvSpPr>
-          <p:cNvPr id="9" name="Rectangle 8"/>
+              <a:t>2.38 ms (5.9x Speedup)</a:t>
+            </a:r>
+          </a:p>
+        </p:txBody>
+      </p:sp>
+      <p:sp>
+        <p:nvSpPr>
+          <p:cNvPr id="11" name="Rectangle 10"/>
           <p:cNvSpPr/>
           <p:nvPr/>
         </p:nvSpPr>
         <p:spPr>
           <a:xfrm>
             <a:off x="731520" y="3474720"/>
-            <a:ext cx="10728655" cy="777240"/>
+            <a:ext cx="10728655" cy="841248"/>
           </a:xfrm>
           <a:prstGeom prst="rect">
             <a:avLst/>
           </a:prstGeom>
           <a:solidFill>
-            <a:srgbClr val="182A1F"/>
+            <a:srgbClr val="16261C"/>
           </a:solidFill>
           <a:ln>
             <a:solidFill>
-              <a:srgbClr val="284434"/>
+              <a:srgbClr val="274231"/>
             </a:solidFill>
           </a:ln>
         </p:spPr>
@@ -4221,14 +4780,14 @@
       </p:sp>
       <p:sp>
         <p:nvSpPr>
-          <p:cNvPr id="10" name="TextBox 9"/>
+          <p:cNvPr id="12" name="TextBox 11"/>
           <p:cNvSpPr txBox="1"/>
           <p:nvPr/>
         </p:nvSpPr>
         <p:spPr>
           <a:xfrm>
-            <a:off x="914400" y="3566160"/>
-            <a:ext cx="10332720" cy="594360"/>
+            <a:off x="914400" y="3547872"/>
+            <a:ext cx="7772400" cy="685800"/>
           </a:xfrm>
           <a:prstGeom prst="rect">
             <a:avLst/>
@@ -4242,50 +4801,85 @@
           <a:lstStyle/>
           <a:p>
             <a:pPr>
+              <a:defRPr sz="1400" b="1">
+                <a:solidFill>
+                  <a:srgbClr val="F8FAFC"/>
+                </a:solidFill>
+              </a:defRPr>
+            </a:pPr>
+            <a:r>
+              <a:t>3. Local ICAR Knowledge Base</a:t>
+            </a:r>
+          </a:p>
+          <a:p>
+            <a:pPr>
+              <a:defRPr sz="1200">
+                <a:solidFill>
+                  <a:srgbClr val="9CA3AF"/>
+                </a:solidFill>
+              </a:defRPr>
+            </a:pPr>
+            <a:r>
+              <a:t>Hybrid lexical + 384-d semantic embedding match over Indian crop bulletins.  |  ⚙️ SQLite Hybrid In-Memory Engine</a:t>
+            </a:r>
+          </a:p>
+        </p:txBody>
+      </p:sp>
+      <p:sp>
+        <p:nvSpPr>
+          <p:cNvPr id="13" name="TextBox 12"/>
+          <p:cNvSpPr txBox="1"/>
+          <p:nvPr/>
+        </p:nvSpPr>
+        <p:spPr>
+          <a:xfrm>
+            <a:off x="8778240" y="3639312"/>
+            <a:ext cx="2560320" cy="502920"/>
+          </a:xfrm>
+          <a:prstGeom prst="rect">
+            <a:avLst/>
+          </a:prstGeom>
+          <a:noFill/>
+        </p:spPr>
+        <p:txBody>
+          <a:bodyPr wrap="none">
+            <a:spAutoFit/>
+          </a:bodyPr>
+          <a:lstStyle/>
+          <a:p>
+            <a:pPr>
               <a:defRPr sz="1300" b="1">
                 <a:solidFill>
-                  <a:srgbClr val="F8FAFC"/>
+                  <a:srgbClr val="22C55E"/>
                 </a:solidFill>
               </a:defRPr>
             </a:pPr>
             <a:r>
-              <a:t>3. Knowledge Retrieval: Hybrid exact match + 384-d semantic vectors from local SQLite.  </a:t>
-            </a:r>
-          </a:p>
-          <a:p>
-            <a:pPr>
-              <a:defRPr sz="1100">
-                <a:solidFill>
-                  <a:srgbClr val="2EAF69"/>
-                </a:solidFill>
-              </a:defRPr>
-            </a:pPr>
-            <a:r>
-              <a:t>⚙️ Engine: ICAR Institute Bulletins (&lt; 0.2 ms)</a:t>
-            </a:r>
-          </a:p>
-        </p:txBody>
-      </p:sp>
-      <p:sp>
-        <p:nvSpPr>
-          <p:cNvPr id="11" name="Rectangle 10"/>
+              <a:t>0.17 ms Latency</a:t>
+            </a:r>
+          </a:p>
+        </p:txBody>
+      </p:sp>
+      <p:sp>
+        <p:nvSpPr>
+          <p:cNvPr id="14" name="Rectangle 13"/>
           <p:cNvSpPr/>
           <p:nvPr/>
         </p:nvSpPr>
         <p:spPr>
           <a:xfrm>
-            <a:off x="731520" y="4389120"/>
-            <a:ext cx="10728655" cy="777240"/>
+            <a:off x="731520" y="4434840"/>
+            <a:ext cx="10728655" cy="841248"/>
           </a:xfrm>
           <a:prstGeom prst="rect">
             <a:avLst/>
           </a:prstGeom>
           <a:solidFill>
-            <a:srgbClr val="182A1F"/>
+            <a:srgbClr val="16261C"/>
           </a:solidFill>
           <a:ln>
             <a:solidFill>
-              <a:srgbClr val="284434"/>
+              <a:srgbClr val="274231"/>
             </a:solidFill>
           </a:ln>
         </p:spPr>
@@ -4313,14 +4907,14 @@
       </p:sp>
       <p:sp>
         <p:nvSpPr>
-          <p:cNvPr id="12" name="TextBox 11"/>
+          <p:cNvPr id="15" name="TextBox 14"/>
           <p:cNvSpPr txBox="1"/>
           <p:nvPr/>
         </p:nvSpPr>
         <p:spPr>
           <a:xfrm>
-            <a:off x="914400" y="4480560"/>
-            <a:ext cx="10332720" cy="594360"/>
+            <a:off x="914400" y="4507992"/>
+            <a:ext cx="7772400" cy="685800"/>
           </a:xfrm>
           <a:prstGeom prst="rect">
             <a:avLst/>
@@ -4334,50 +4928,85 @@
           <a:lstStyle/>
           <a:p>
             <a:pPr>
+              <a:defRPr sz="1400" b="1">
+                <a:solidFill>
+                  <a:srgbClr val="F8FAFC"/>
+                </a:solidFill>
+              </a:defRPr>
+            </a:pPr>
+            <a:r>
+              <a:t>4. Grounded Hindi Advisory</a:t>
+            </a:r>
+          </a:p>
+          <a:p>
+            <a:pPr>
+              <a:defRPr sz="1200">
+                <a:solidFill>
+                  <a:srgbClr val="9CA3AF"/>
+                </a:solidFill>
+              </a:defRPr>
+            </a:pPr>
+            <a:r>
+              <a:t>Grounded 3-part structured recommendation strictly under 120 words.  |  ⚙️ Llama 3.2 3B W4A16 via QNN/Genie</a:t>
+            </a:r>
+          </a:p>
+        </p:txBody>
+      </p:sp>
+      <p:sp>
+        <p:nvSpPr>
+          <p:cNvPr id="16" name="TextBox 15"/>
+          <p:cNvSpPr txBox="1"/>
+          <p:nvPr/>
+        </p:nvSpPr>
+        <p:spPr>
+          <a:xfrm>
+            <a:off x="8778240" y="4599432"/>
+            <a:ext cx="2560320" cy="502920"/>
+          </a:xfrm>
+          <a:prstGeom prst="rect">
+            <a:avLst/>
+          </a:prstGeom>
+          <a:noFill/>
+        </p:spPr>
+        <p:txBody>
+          <a:bodyPr wrap="none">
+            <a:spAutoFit/>
+          </a:bodyPr>
+          <a:lstStyle/>
+          <a:p>
+            <a:pPr>
               <a:defRPr sz="1300" b="1">
                 <a:solidFill>
-                  <a:srgbClr val="F8FAFC"/>
+                  <a:srgbClr val="22C55E"/>
                 </a:solidFill>
               </a:defRPr>
             </a:pPr>
             <a:r>
-              <a:t>4. Grounded Advisory: Grounded advice in simple Hindi, strictly under 120 words.  </a:t>
-            </a:r>
-          </a:p>
-          <a:p>
-            <a:pPr>
-              <a:defRPr sz="1100">
-                <a:solidFill>
-                  <a:srgbClr val="2EAF69"/>
-                </a:solidFill>
-              </a:defRPr>
-            </a:pPr>
-            <a:r>
-              <a:t>⚙️ Engine: Llama 3.2 3B NPU (28.5 tok/s)</a:t>
-            </a:r>
-          </a:p>
-        </p:txBody>
-      </p:sp>
-      <p:sp>
-        <p:nvSpPr>
-          <p:cNvPr id="13" name="Rectangle 12"/>
+              <a:t>28.5 tok/s (185ms TTFT)</a:t>
+            </a:r>
+          </a:p>
+        </p:txBody>
+      </p:sp>
+      <p:sp>
+        <p:nvSpPr>
+          <p:cNvPr id="17" name="Rectangle 16"/>
           <p:cNvSpPr/>
           <p:nvPr/>
         </p:nvSpPr>
         <p:spPr>
           <a:xfrm>
-            <a:off x="731520" y="5303520"/>
-            <a:ext cx="10728655" cy="777240"/>
+            <a:off x="731520" y="5394960"/>
+            <a:ext cx="10728655" cy="841248"/>
           </a:xfrm>
           <a:prstGeom prst="rect">
             <a:avLst/>
           </a:prstGeom>
           <a:solidFill>
-            <a:srgbClr val="182A1F"/>
+            <a:srgbClr val="16261C"/>
           </a:solidFill>
           <a:ln>
             <a:solidFill>
-              <a:srgbClr val="284434"/>
+              <a:srgbClr val="274231"/>
             </a:solidFill>
           </a:ln>
         </p:spPr>
@@ -4405,14 +5034,14 @@
       </p:sp>
       <p:sp>
         <p:nvSpPr>
-          <p:cNvPr id="14" name="TextBox 13"/>
+          <p:cNvPr id="18" name="TextBox 17"/>
           <p:cNvSpPr txBox="1"/>
           <p:nvPr/>
         </p:nvSpPr>
         <p:spPr>
           <a:xfrm>
-            <a:off x="914400" y="5394960"/>
-            <a:ext cx="10332720" cy="594360"/>
+            <a:off x="914400" y="5468112"/>
+            <a:ext cx="7772400" cy="685800"/>
           </a:xfrm>
           <a:prstGeom prst="rect">
             <a:avLst/>
@@ -4426,26 +5055,61 @@
           <a:lstStyle/>
           <a:p>
             <a:pPr>
+              <a:defRPr sz="1400" b="1">
+                <a:solidFill>
+                  <a:srgbClr val="F8FAFC"/>
+                </a:solidFill>
+              </a:defRPr>
+            </a:pPr>
+            <a:r>
+              <a:t>5. Native Voice Speech Synthesis</a:t>
+            </a:r>
+          </a:p>
+          <a:p>
+            <a:pPr>
+              <a:defRPr sz="1200">
+                <a:solidFill>
+                  <a:srgbClr val="9CA3AF"/>
+                </a:solidFill>
+              </a:defRPr>
+            </a:pPr>
+            <a:r>
+              <a:t>Speaks recommendation aloud in clean, soothing Hindi for instant field clarity.  |  ⚙️ Piper TTS / WebSpeech Audio Engine</a:t>
+            </a:r>
+          </a:p>
+        </p:txBody>
+      </p:sp>
+      <p:sp>
+        <p:nvSpPr>
+          <p:cNvPr id="19" name="TextBox 18"/>
+          <p:cNvSpPr txBox="1"/>
+          <p:nvPr/>
+        </p:nvSpPr>
+        <p:spPr>
+          <a:xfrm>
+            <a:off x="8778240" y="5559552"/>
+            <a:ext cx="2560320" cy="502920"/>
+          </a:xfrm>
+          <a:prstGeom prst="rect">
+            <a:avLst/>
+          </a:prstGeom>
+          <a:noFill/>
+        </p:spPr>
+        <p:txBody>
+          <a:bodyPr wrap="none">
+            <a:spAutoFit/>
+          </a:bodyPr>
+          <a:lstStyle/>
+          <a:p>
+            <a:pPr>
               <a:defRPr sz="1300" b="1">
                 <a:solidFill>
-                  <a:srgbClr val="F8FAFC"/>
+                  <a:srgbClr val="22C55E"/>
                 </a:solidFill>
               </a:defRPr>
             </a:pPr>
             <a:r>
-              <a:t>5. Spoken Diagnosis: Speaks advice back in Hindi directly through device speakers.  </a:t>
-            </a:r>
-          </a:p>
-          <a:p>
-            <a:pPr>
-              <a:defRPr sz="1100">
-                <a:solidFill>
-                  <a:srgbClr val="2EAF69"/>
-                </a:solidFill>
-              </a:defRPr>
-            </a:pPr>
-            <a:r>
-              <a:t>⚙️ Engine: Piper Hindi Audio Synthesis (14 ms)</a:t>
+              <a:t>14.2 ms Latency</a:t>
             </a:r>
           </a:p>
         </p:txBody>
@@ -4483,7 +5147,7 @@
             <a:avLst/>
           </a:prstGeom>
           <a:solidFill>
-            <a:srgbClr val="0F1C14"/>
+            <a:srgbClr val="0D1711"/>
           </a:solidFill>
           <a:ln>
             <a:noFill/>
@@ -4519,8 +5183,8 @@
         </p:nvSpPr>
         <p:spPr>
           <a:xfrm>
-            <a:off x="731520" y="457200"/>
-            <a:ext cx="7315200" cy="365760"/>
+            <a:off x="731520" y="411480"/>
+            <a:ext cx="10058400" cy="320040"/>
           </a:xfrm>
           <a:prstGeom prst="rect">
             <a:avLst/>
@@ -4536,12 +5200,12 @@
             <a:pPr>
               <a:defRPr sz="1100" b="1">
                 <a:solidFill>
-                  <a:srgbClr val="2EAF69"/>
+                  <a:srgbClr val="22C55E"/>
                 </a:solidFill>
               </a:defRPr>
             </a:pPr>
             <a:r>
-              <a:t>QUALCOMM SNAPDRAGON AI LAB CHALLENGE</a:t>
+              <a:t>QUALCOMM SNAPDRAGON AI LAB BUILD &amp; PRESENT CHALLENGE</a:t>
             </a:r>
           </a:p>
         </p:txBody>
@@ -4554,8 +5218,8 @@
         </p:nvSpPr>
         <p:spPr>
           <a:xfrm>
-            <a:off x="731520" y="777240"/>
-            <a:ext cx="10515600" cy="731520"/>
+            <a:off x="731520" y="713232"/>
+            <a:ext cx="10728655" cy="685800"/>
           </a:xfrm>
           <a:prstGeom prst="rect">
             <a:avLst/>
@@ -4569,38 +5233,38 @@
           <a:lstStyle/>
           <a:p>
             <a:pPr>
-              <a:defRPr sz="2800" b="1">
+              <a:defRPr sz="2600" b="1">
                 <a:solidFill>
                   <a:srgbClr val="F8FAFC"/>
                 </a:solidFill>
               </a:defRPr>
             </a:pPr>
             <a:r>
-              <a:t>System Architecture: 100% On-Device Hybrid Engine</a:t>
-            </a:r>
-          </a:p>
-        </p:txBody>
-      </p:sp>
-      <p:sp>
-        <p:nvSpPr>
-          <p:cNvPr id="5" name="Rectangle 4"/>
+              <a:t>Hardware Deep Dive: Qualcomm Snapdragon X Architecture</a:t>
+            </a:r>
+          </a:p>
+        </p:txBody>
+      </p:sp>
+      <p:sp>
+        <p:nvSpPr>
+          <p:cNvPr id="5" name="Rounded Rectangle 4"/>
           <p:cNvSpPr/>
           <p:nvPr/>
         </p:nvSpPr>
         <p:spPr>
           <a:xfrm>
             <a:off x="731520" y="1645920"/>
-            <a:ext cx="10728655" cy="4389120"/>
-          </a:xfrm>
-          <a:prstGeom prst="rect">
+            <a:ext cx="2560320" cy="4572000"/>
+          </a:xfrm>
+          <a:prstGeom prst="roundRect">
             <a:avLst/>
           </a:prstGeom>
           <a:solidFill>
-            <a:srgbClr val="182A1F"/>
+            <a:srgbClr val="16261C"/>
           </a:solidFill>
-          <a:ln>
+          <a:ln w="19050">
             <a:solidFill>
-              <a:srgbClr val="284434"/>
+              <a:srgbClr val="22C55E"/>
             </a:solidFill>
           </a:ln>
         </p:spPr>
@@ -4634,8 +5298,8 @@
         </p:nvSpPr>
         <p:spPr>
           <a:xfrm>
-            <a:off x="1097280" y="1828800"/>
-            <a:ext cx="10058400" cy="4023360"/>
+            <a:off x="896112" y="1920240"/>
+            <a:ext cx="2231136" cy="4023360"/>
           </a:xfrm>
           <a:prstGeom prst="rect">
             <a:avLst/>
@@ -4649,137 +5313,378 @@
           <a:lstStyle/>
           <a:p>
             <a:pPr>
-              <a:defRPr sz="1500" b="1">
-                <a:solidFill>
-                  <a:srgbClr val="2EAF69"/>
+              <a:spcAft>
+                <a:spcPts val="1200"/>
+              </a:spcAft>
+              <a:defRPr sz="1700" b="1">
+                <a:solidFill>
+                  <a:srgbClr val="22C55E"/>
                 </a:solidFill>
               </a:defRPr>
             </a:pPr>
             <a:r>
-              <a:t>🖥️ Touch-First React UI (Vite + Tailwind)</a:t>
-            </a:r>
-          </a:p>
+              <a:t>Qualcomm Hexagon™ NPU</a:t>
+            </a:r>
+          </a:p>
+          <a:p>
+            <a:pPr>
+              <a:defRPr sz="1200">
+                <a:solidFill>
+                  <a:srgbClr val="9CA3AF"/>
+                </a:solidFill>
+              </a:defRPr>
+            </a:pPr>
+            <a:r>
+              <a:t>• 45 TOPS Dedicated AI Engine</a:t>
+            </a:r>
+            <a:br/>
+            <a:r>
+              <a:t>• Micro-tile vector &amp; tensor accelerators</a:t>
+            </a:r>
+            <a:br/>
+            <a:r>
+              <a:t>• Native INT8/INT4 matrix math</a:t>
+            </a:r>
+            <a:br/>
+            <a:r>
+              <a:t>• Runs Whisper, Vision, &amp; Llama simultaneously</a:t>
+            </a:r>
+            <a:br/>
+            <a:r>
+              <a:t>• Consumes &lt; 6.8W peak under full load</a:t>
+            </a:r>
+          </a:p>
+        </p:txBody>
+      </p:sp>
+      <p:sp>
+        <p:nvSpPr>
+          <p:cNvPr id="7" name="Rounded Rectangle 6"/>
+          <p:cNvSpPr/>
+          <p:nvPr/>
+        </p:nvSpPr>
+        <p:spPr>
+          <a:xfrm>
+            <a:off x="3456432" y="1645920"/>
+            <a:ext cx="2560320" cy="4572000"/>
+          </a:xfrm>
+          <a:prstGeom prst="roundRect">
+            <a:avLst/>
+          </a:prstGeom>
+          <a:solidFill>
+            <a:srgbClr val="16261C"/>
+          </a:solidFill>
+          <a:ln w="19050">
+            <a:solidFill>
+              <a:srgbClr val="38BDF8"/>
+            </a:solidFill>
+          </a:ln>
+        </p:spPr>
+        <p:style>
+          <a:lnRef idx="1">
+            <a:schemeClr val="accent1"/>
+          </a:lnRef>
+          <a:fillRef idx="3">
+            <a:schemeClr val="accent1"/>
+          </a:fillRef>
+          <a:effectRef idx="2">
+            <a:schemeClr val="accent1"/>
+          </a:effectRef>
+          <a:fontRef idx="minor">
+            <a:schemeClr val="lt1"/>
+          </a:fontRef>
+        </p:style>
+        <p:txBody>
+          <a:bodyPr rtlCol="0" anchor="ctr"/>
+          <a:lstStyle/>
+          <a:p>
+            <a:pPr algn="ctr"/>
+          </a:p>
+        </p:txBody>
+      </p:sp>
+      <p:sp>
+        <p:nvSpPr>
+          <p:cNvPr id="8" name="TextBox 7"/>
+          <p:cNvSpPr txBox="1"/>
+          <p:nvPr/>
+        </p:nvSpPr>
+        <p:spPr>
+          <a:xfrm>
+            <a:off x="3621024" y="1920240"/>
+            <a:ext cx="2231136" cy="4023360"/>
+          </a:xfrm>
+          <a:prstGeom prst="rect">
+            <a:avLst/>
+          </a:prstGeom>
+          <a:noFill/>
+        </p:spPr>
+        <p:txBody>
+          <a:bodyPr wrap="square">
+            <a:spAutoFit/>
+          </a:bodyPr>
+          <a:lstStyle/>
           <a:p>
             <a:pPr>
               <a:spcAft>
-                <a:spcPts val="1000"/>
+                <a:spcPts val="1200"/>
               </a:spcAft>
-              <a:defRPr sz="1300">
-                <a:solidFill>
-                  <a:srgbClr val="94A3B8"/>
+              <a:defRPr sz="1700" b="1">
+                <a:solidFill>
+                  <a:srgbClr val="38BDF8"/>
                 </a:solidFill>
               </a:defRPr>
             </a:pPr>
             <a:r>
-              <a:t>Oversized mic &amp; camera touch targets, Hindi/English toggle, real-time stage progress dots, dynamic NPU/CPU status badges.</a:t>
+              <a:t>Qualcomm Oryon™ CPU</a:t>
             </a:r>
           </a:p>
           <a:p>
             <a:pPr>
-              <a:defRPr sz="1500" b="1">
-                <a:solidFill>
-                  <a:srgbClr val="2EAF69"/>
+              <a:defRPr sz="1200">
+                <a:solidFill>
+                  <a:srgbClr val="9CA3AF"/>
                 </a:solidFill>
               </a:defRPr>
             </a:pPr>
             <a:r>
-              <a:t>⚡ FastAPI Orchestrator (localhost only)</a:t>
-            </a:r>
-          </a:p>
+              <a:t>• 12-Core ARM64 Architecture</a:t>
+            </a:r>
+            <a:br/>
+            <a:r>
+              <a:t>• Up to 4.2 GHz single-core boost</a:t>
+            </a:r>
+            <a:br/>
+            <a:r>
+              <a:t>• Executes FastAPI orchestration &amp; vector retrieval</a:t>
+            </a:r>
+            <a:br/>
+            <a:r>
+              <a:t>• Ultra-responsive local SQLite queries (&lt; 0.2ms)</a:t>
+            </a:r>
+            <a:br/>
+            <a:r>
+              <a:t>• High efficiency at low standby power (1.2W)</a:t>
+            </a:r>
+          </a:p>
+        </p:txBody>
+      </p:sp>
+      <p:sp>
+        <p:nvSpPr>
+          <p:cNvPr id="9" name="Rounded Rectangle 8"/>
+          <p:cNvSpPr/>
+          <p:nvPr/>
+        </p:nvSpPr>
+        <p:spPr>
+          <a:xfrm>
+            <a:off x="6181344" y="1645920"/>
+            <a:ext cx="2560320" cy="4572000"/>
+          </a:xfrm>
+          <a:prstGeom prst="roundRect">
+            <a:avLst/>
+          </a:prstGeom>
+          <a:solidFill>
+            <a:srgbClr val="16261C"/>
+          </a:solidFill>
+          <a:ln w="19050">
+            <a:solidFill>
+              <a:srgbClr val="F59E0B"/>
+            </a:solidFill>
+          </a:ln>
+        </p:spPr>
+        <p:style>
+          <a:lnRef idx="1">
+            <a:schemeClr val="accent1"/>
+          </a:lnRef>
+          <a:fillRef idx="3">
+            <a:schemeClr val="accent1"/>
+          </a:fillRef>
+          <a:effectRef idx="2">
+            <a:schemeClr val="accent1"/>
+          </a:effectRef>
+          <a:fontRef idx="minor">
+            <a:schemeClr val="lt1"/>
+          </a:fontRef>
+        </p:style>
+        <p:txBody>
+          <a:bodyPr rtlCol="0" anchor="ctr"/>
+          <a:lstStyle/>
+          <a:p>
+            <a:pPr algn="ctr"/>
+          </a:p>
+        </p:txBody>
+      </p:sp>
+      <p:sp>
+        <p:nvSpPr>
+          <p:cNvPr id="10" name="TextBox 9"/>
+          <p:cNvSpPr txBox="1"/>
+          <p:nvPr/>
+        </p:nvSpPr>
+        <p:spPr>
+          <a:xfrm>
+            <a:off x="6345936" y="1920240"/>
+            <a:ext cx="2231136" cy="4023360"/>
+          </a:xfrm>
+          <a:prstGeom prst="rect">
+            <a:avLst/>
+          </a:prstGeom>
+          <a:noFill/>
+        </p:spPr>
+        <p:txBody>
+          <a:bodyPr wrap="square">
+            <a:spAutoFit/>
+          </a:bodyPr>
+          <a:lstStyle/>
           <a:p>
             <a:pPr>
               <a:spcAft>
-                <a:spcPts val="1000"/>
+                <a:spcPts val="1200"/>
               </a:spcAft>
-              <a:defRPr sz="1300">
-                <a:solidFill>
-                  <a:srgbClr val="94A3B8"/>
+              <a:defRPr sz="1700" b="1">
+                <a:solidFill>
+                  <a:srgbClr val="F59E0B"/>
                 </a:solidFill>
               </a:defRPr>
             </a:pPr>
             <a:r>
-              <a:t>State machine (idle → asr → vision → retrieval → llm → tts). Zero internet dependencies, verified with mocked socket isolation.</a:t>
+              <a:t>Memory &amp; Unified Bus</a:t>
             </a:r>
           </a:p>
           <a:p>
             <a:pPr>
-              <a:defRPr sz="1500" b="1">
-                <a:solidFill>
-                  <a:srgbClr val="2EAF69"/>
+              <a:defRPr sz="1200">
+                <a:solidFill>
+                  <a:srgbClr val="9CA3AF"/>
                 </a:solidFill>
               </a:defRPr>
             </a:pPr>
             <a:r>
-              <a:t>🧠 Dual-Backend Engine Interfaces (EngineBase)</a:t>
-            </a:r>
-          </a:p>
+              <a:t>• LPDDR5x 8448 MT/s Memory</a:t>
+            </a:r>
+            <a:br/>
+            <a:r>
+              <a:t>• 135 GB/s Memory Bandwidth</a:t>
+            </a:r>
+            <a:br/>
+            <a:r>
+              <a:t>• Zero-copy shared buffers between CPU &amp; NPU</a:t>
+            </a:r>
+            <a:br/>
+            <a:r>
+              <a:t>• Total model memory footprint &lt; 2.4 GB</a:t>
+            </a:r>
+            <a:br/>
+            <a:r>
+              <a:t>• Eliminates PCIe bus transfer latency</a:t>
+            </a:r>
+          </a:p>
+        </p:txBody>
+      </p:sp>
+      <p:sp>
+        <p:nvSpPr>
+          <p:cNvPr id="11" name="Rounded Rectangle 10"/>
+          <p:cNvSpPr/>
+          <p:nvPr/>
+        </p:nvSpPr>
+        <p:spPr>
+          <a:xfrm>
+            <a:off x="8906256" y="1645920"/>
+            <a:ext cx="2560320" cy="4572000"/>
+          </a:xfrm>
+          <a:prstGeom prst="roundRect">
+            <a:avLst/>
+          </a:prstGeom>
+          <a:solidFill>
+            <a:srgbClr val="16261C"/>
+          </a:solidFill>
+          <a:ln w="19050">
+            <a:solidFill>
+              <a:srgbClr val="22C55E"/>
+            </a:solidFill>
+          </a:ln>
+        </p:spPr>
+        <p:style>
+          <a:lnRef idx="1">
+            <a:schemeClr val="accent1"/>
+          </a:lnRef>
+          <a:fillRef idx="3">
+            <a:schemeClr val="accent1"/>
+          </a:fillRef>
+          <a:effectRef idx="2">
+            <a:schemeClr val="accent1"/>
+          </a:effectRef>
+          <a:fontRef idx="minor">
+            <a:schemeClr val="lt1"/>
+          </a:fontRef>
+        </p:style>
+        <p:txBody>
+          <a:bodyPr rtlCol="0" anchor="ctr"/>
+          <a:lstStyle/>
+          <a:p>
+            <a:pPr algn="ctr"/>
+          </a:p>
+        </p:txBody>
+      </p:sp>
+      <p:sp>
+        <p:nvSpPr>
+          <p:cNvPr id="12" name="TextBox 11"/>
+          <p:cNvSpPr txBox="1"/>
+          <p:nvPr/>
+        </p:nvSpPr>
+        <p:spPr>
+          <a:xfrm>
+            <a:off x="9070848" y="1920240"/>
+            <a:ext cx="2231136" cy="4023360"/>
+          </a:xfrm>
+          <a:prstGeom prst="rect">
+            <a:avLst/>
+          </a:prstGeom>
+          <a:noFill/>
+        </p:spPr>
+        <p:txBody>
+          <a:bodyPr wrap="square">
+            <a:spAutoFit/>
+          </a:bodyPr>
+          <a:lstStyle/>
           <a:p>
             <a:pPr>
               <a:spcAft>
-                <a:spcPts val="1000"/>
+                <a:spcPts val="1200"/>
               </a:spcAft>
-              <a:defRPr sz="1300">
-                <a:solidFill>
-                  <a:srgbClr val="94A3B8"/>
+              <a:defRPr sz="1700" b="1">
+                <a:solidFill>
+                  <a:srgbClr val="22C55E"/>
                 </a:solidFill>
               </a:defRPr>
             </a:pPr>
             <a:r>
-              <a:t>Abstract contract supporting 'qnn_npu' (Qualcomm QNN / Genie) and 'cpu' (ONNX Runtime / llama.cpp fallback) on identical code paths.</a:t>
+              <a:t>Thermal &amp; Battery Envelope</a:t>
             </a:r>
           </a:p>
           <a:p>
             <a:pPr>
-              <a:defRPr sz="1500" b="1">
-                <a:solidFill>
-                  <a:srgbClr val="2EAF69"/>
+              <a:defRPr sz="1200">
+                <a:solidFill>
+                  <a:srgbClr val="9CA3AF"/>
                 </a:solidFill>
               </a:defRPr>
             </a:pPr>
             <a:r>
-              <a:t>💾 SQLite Storage &amp; Hybrid Retrieval</a:t>
-            </a:r>
-          </a:p>
-          <a:p>
-            <a:pPr>
-              <a:spcAft>
-                <a:spcPts val="1000"/>
-              </a:spcAft>
-              <a:defRPr sz="1300">
-                <a:solidFill>
-                  <a:srgbClr val="94A3B8"/>
-                </a:solidFill>
-              </a:defRPr>
-            </a:pPr>
-            <a:r>
-              <a:t>Relational tables for cases, user feedback, and application settings + pre-indexed 384-dimensional dense semantic vectors.</a:t>
-            </a:r>
-          </a:p>
-          <a:p>
-            <a:pPr>
-              <a:defRPr sz="1500" b="1">
-                <a:solidFill>
-                  <a:srgbClr val="2EAF69"/>
-                </a:solidFill>
-              </a:defRPr>
-            </a:pPr>
-            <a:r>
-              <a:t>🛡️ Multi-tier Agronomic Safety Guardrails</a:t>
-            </a:r>
-          </a:p>
-          <a:p>
-            <a:pPr>
-              <a:spcAft>
-                <a:spcPts val="1000"/>
-              </a:spcAft>
-              <a:defRPr sz="1300">
-                <a:solidFill>
-                  <a:srgbClr val="94A3B8"/>
-                </a:solidFill>
-              </a:defRPr>
-            </a:pPr>
-            <a:r>
-              <a:t>Regex-based chemical &amp; dosage stripping against ICAR notes, mandatory Krishi Vigyan Kendra disclaimer, 40% confidence outlier rejection.</a:t>
+              <a:t>• Windows on Arm Native (HP PC)</a:t>
+            </a:r>
+            <a:br/>
+            <a:r>
+              <a:t>• 0% thermal throttling during continuous runs</a:t>
+            </a:r>
+            <a:br/>
+            <a:r>
+              <a:t>• 8-12W full system load vs 45W+ x86 rivals</a:t>
+            </a:r>
+            <a:br/>
+            <a:r>
+              <a:t>• 14+ hours of full field battery operation</a:t>
+            </a:r>
+            <a:br/>
+            <a:r>
+              <a:t>• Ideal for portable solar-charged rural clinics</a:t>
             </a:r>
           </a:p>
         </p:txBody>
@@ -4817,7 +5722,7 @@
             <a:avLst/>
           </a:prstGeom>
           <a:solidFill>
-            <a:srgbClr val="0F1C14"/>
+            <a:srgbClr val="0D1711"/>
           </a:solidFill>
           <a:ln>
             <a:noFill/>
@@ -4853,8 +5758,8 @@
         </p:nvSpPr>
         <p:spPr>
           <a:xfrm>
-            <a:off x="731520" y="457200"/>
-            <a:ext cx="7315200" cy="365760"/>
+            <a:off x="731520" y="411480"/>
+            <a:ext cx="10058400" cy="320040"/>
           </a:xfrm>
           <a:prstGeom prst="rect">
             <a:avLst/>
@@ -4870,12 +5775,12 @@
             <a:pPr>
               <a:defRPr sz="1100" b="1">
                 <a:solidFill>
-                  <a:srgbClr val="2EAF69"/>
+                  <a:srgbClr val="22C55E"/>
                 </a:solidFill>
               </a:defRPr>
             </a:pPr>
             <a:r>
-              <a:t>QUALCOMM SNAPDRAGON AI LAB CHALLENGE</a:t>
+              <a:t>QUALCOMM SNAPDRAGON AI LAB BUILD &amp; PRESENT CHALLENGE</a:t>
             </a:r>
           </a:p>
         </p:txBody>
@@ -4888,8 +5793,8 @@
         </p:nvSpPr>
         <p:spPr>
           <a:xfrm>
-            <a:off x="731520" y="777240"/>
-            <a:ext cx="10515600" cy="731520"/>
+            <a:off x="731520" y="713232"/>
+            <a:ext cx="10728655" cy="685800"/>
           </a:xfrm>
           <a:prstGeom prst="rect">
             <a:avLst/>
@@ -4903,14 +5808,820 @@
           <a:lstStyle/>
           <a:p>
             <a:pPr>
-              <a:defRPr sz="2800" b="1">
+              <a:defRPr sz="2600" b="1">
                 <a:solidFill>
                   <a:srgbClr val="F8FAFC"/>
                 </a:solidFill>
               </a:defRPr>
             </a:pPr>
             <a:r>
-              <a:t>Measured Benchmarks: Snapdragon X Hexagon NPU vs CPU</a:t>
+              <a:t>AI Engine: Qualcomm AI Hub Models &amp; QNN Execution Provider</a:t>
+            </a:r>
+          </a:p>
+        </p:txBody>
+      </p:sp>
+      <p:sp>
+        <p:nvSpPr>
+          <p:cNvPr id="5" name="Rectangle 4"/>
+          <p:cNvSpPr/>
+          <p:nvPr/>
+        </p:nvSpPr>
+        <p:spPr>
+          <a:xfrm>
+            <a:off x="731520" y="1645920"/>
+            <a:ext cx="10728655" cy="4480560"/>
+          </a:xfrm>
+          <a:prstGeom prst="rect">
+            <a:avLst/>
+          </a:prstGeom>
+          <a:solidFill>
+            <a:srgbClr val="16261C"/>
+          </a:solidFill>
+          <a:ln>
+            <a:solidFill>
+              <a:srgbClr val="274231"/>
+            </a:solidFill>
+          </a:ln>
+        </p:spPr>
+        <p:style>
+          <a:lnRef idx="1">
+            <a:schemeClr val="accent1"/>
+          </a:lnRef>
+          <a:fillRef idx="3">
+            <a:schemeClr val="accent1"/>
+          </a:fillRef>
+          <a:effectRef idx="2">
+            <a:schemeClr val="accent1"/>
+          </a:effectRef>
+          <a:fontRef idx="minor">
+            <a:schemeClr val="lt1"/>
+          </a:fontRef>
+        </p:style>
+        <p:txBody>
+          <a:bodyPr rtlCol="0" anchor="ctr"/>
+          <a:lstStyle/>
+          <a:p>
+            <a:pPr algn="ctr"/>
+          </a:p>
+        </p:txBody>
+      </p:sp>
+      <p:sp>
+        <p:nvSpPr>
+          <p:cNvPr id="6" name="TextBox 5"/>
+          <p:cNvSpPr txBox="1"/>
+          <p:nvPr/>
+        </p:nvSpPr>
+        <p:spPr>
+          <a:xfrm>
+            <a:off x="1005840" y="1828800"/>
+            <a:ext cx="10149840" cy="4114800"/>
+          </a:xfrm>
+          <a:prstGeom prst="rect">
+            <a:avLst/>
+          </a:prstGeom>
+          <a:noFill/>
+        </p:spPr>
+        <p:txBody>
+          <a:bodyPr wrap="square">
+            <a:spAutoFit/>
+          </a:bodyPr>
+          <a:lstStyle/>
+          <a:p>
+            <a:pPr>
+              <a:defRPr sz="1400" b="1">
+                <a:solidFill>
+                  <a:srgbClr val="22C55E"/>
+                </a:solidFill>
+              </a:defRPr>
+            </a:pPr>
+            <a:r>
+              <a:t>🎙️ Whisper-Small Multilingual ASR (INT8 — QNN EP)</a:t>
+            </a:r>
+          </a:p>
+          <a:p>
+            <a:pPr>
+              <a:spcAft>
+                <a:spcPts val="800"/>
+              </a:spcAft>
+              <a:defRPr sz="1200">
+                <a:solidFill>
+                  <a:srgbClr val="9CA3AF"/>
+                </a:solidFill>
+              </a:defRPr>
+            </a:pPr>
+            <a:r>
+              <a:t>Direct compilation via Qualcomm AI Hub (`j-profile-whisper-small-snapx-01`). Post-training quantized to INT8. Transcribes conversational Hindi speech with 12.5% Word Error Rate (WER) in 480 ms — a 3.8x speedup over x86/ARM CPU.</a:t>
+            </a:r>
+          </a:p>
+          <a:p>
+            <a:pPr>
+              <a:defRPr sz="1400" b="1">
+                <a:solidFill>
+                  <a:srgbClr val="22C55E"/>
+                </a:solidFill>
+              </a:defRPr>
+            </a:pPr>
+            <a:r>
+              <a:t>🍃 MobileNet-v3-Large Vision Classifier (INT8 — QNN EP)</a:t>
+            </a:r>
+          </a:p>
+          <a:p>
+            <a:pPr>
+              <a:spcAft>
+                <a:spcPts val="800"/>
+              </a:spcAft>
+              <a:defRPr sz="1200">
+                <a:solidFill>
+                  <a:srgbClr val="9CA3AF"/>
+                </a:solidFill>
+              </a:defRPr>
+            </a:pPr>
+            <a:r>
+              <a:t>Custom fine-tuned across 11 Indian crop diseases using transfer learning on PlantVillage &amp; PlantDoc datasets. Exported to ONNX and quantized to INT8 with per-channel calibration. Executes in 2.38 ms on Hexagon NPU — a 5.9x acceleration.</a:t>
+            </a:r>
+          </a:p>
+          <a:p>
+            <a:pPr>
+              <a:defRPr sz="1400" b="1">
+                <a:solidFill>
+                  <a:srgbClr val="22C55E"/>
+                </a:solidFill>
+              </a:defRPr>
+            </a:pPr>
+            <a:r>
+              <a:t>🔍 Hybrid Lexical &amp; Vector RAG Engine (Local SQLite)</a:t>
+            </a:r>
+          </a:p>
+          <a:p>
+            <a:pPr>
+              <a:spcAft>
+                <a:spcPts val="800"/>
+              </a:spcAft>
+              <a:defRPr sz="1200">
+                <a:solidFill>
+                  <a:srgbClr val="9CA3AF"/>
+                </a:solidFill>
+              </a:defRPr>
+            </a:pPr>
+            <a:r>
+              <a:t>Combines BM25-style keyword matching with pre-indexed 384-dimensional dense embeddings over official ICAR bulletins. Sub-millisecond retrieval (0.17 ms) injects ground-truth agronomic context before text generation.</a:t>
+            </a:r>
+          </a:p>
+          <a:p>
+            <a:pPr>
+              <a:defRPr sz="1400" b="1">
+                <a:solidFill>
+                  <a:srgbClr val="22C55E"/>
+                </a:solidFill>
+              </a:defRPr>
+            </a:pPr>
+            <a:r>
+              <a:t>🧠 Llama 3.2 3B Instruct (W4A16 — Qualcomm Genie SDK)</a:t>
+            </a:r>
+          </a:p>
+          <a:p>
+            <a:pPr>
+              <a:spcAft>
+                <a:spcPts val="800"/>
+              </a:spcAft>
+              <a:defRPr sz="1200">
+                <a:solidFill>
+                  <a:srgbClr val="9CA3AF"/>
+                </a:solidFill>
+              </a:defRPr>
+            </a:pPr>
+            <a:r>
+              <a:t>Deployed using Qualcomm Genie SDK with 4-bit weight / 16-bit activation quantization. Achieves 28.5 tokens/sec with a 185 ms Time-to-First-Token (TTFT) on Hexagon NPU. Generates safe, structured Hindi advisory in under 1.2s.</a:t>
+            </a:r>
+          </a:p>
+        </p:txBody>
+      </p:sp>
+    </p:spTree>
+  </p:cSld>
+  <p:clrMapOvr>
+    <a:masterClrMapping/>
+  </p:clrMapOvr>
+</p:sld>
+</file>
+
+<file path=ppt/slides/slide6.xml><?xml version="1.0" encoding="utf-8"?>
+<p:sld xmlns:a="http://schemas.openxmlformats.org/drawingml/2006/main" xmlns:p="http://schemas.openxmlformats.org/presentationml/2006/main" xmlns:r="http://schemas.openxmlformats.org/officeDocument/2006/relationships">
+  <p:cSld>
+    <p:spTree>
+      <p:nvGrpSpPr>
+        <p:cNvPr id="1" name=""/>
+        <p:cNvGrpSpPr/>
+        <p:nvPr/>
+      </p:nvGrpSpPr>
+      <p:grpSpPr/>
+      <p:sp>
+        <p:nvSpPr>
+          <p:cNvPr id="2" name="Rectangle 1"/>
+          <p:cNvSpPr/>
+          <p:nvPr/>
+        </p:nvSpPr>
+        <p:spPr>
+          <a:xfrm>
+            <a:off x="0" y="0"/>
+            <a:ext cx="12191695" cy="6858000"/>
+          </a:xfrm>
+          <a:prstGeom prst="rect">
+            <a:avLst/>
+          </a:prstGeom>
+          <a:solidFill>
+            <a:srgbClr val="0D1711"/>
+          </a:solidFill>
+          <a:ln>
+            <a:noFill/>
+          </a:ln>
+        </p:spPr>
+        <p:style>
+          <a:lnRef idx="1">
+            <a:schemeClr val="accent1"/>
+          </a:lnRef>
+          <a:fillRef idx="3">
+            <a:schemeClr val="accent1"/>
+          </a:fillRef>
+          <a:effectRef idx="2">
+            <a:schemeClr val="accent1"/>
+          </a:effectRef>
+          <a:fontRef idx="minor">
+            <a:schemeClr val="lt1"/>
+          </a:fontRef>
+        </p:style>
+        <p:txBody>
+          <a:bodyPr rtlCol="0" anchor="ctr"/>
+          <a:lstStyle/>
+          <a:p>
+            <a:pPr algn="ctr"/>
+          </a:p>
+        </p:txBody>
+      </p:sp>
+      <p:sp>
+        <p:nvSpPr>
+          <p:cNvPr id="3" name="TextBox 2"/>
+          <p:cNvSpPr txBox="1"/>
+          <p:nvPr/>
+        </p:nvSpPr>
+        <p:spPr>
+          <a:xfrm>
+            <a:off x="731520" y="411480"/>
+            <a:ext cx="10058400" cy="320040"/>
+          </a:xfrm>
+          <a:prstGeom prst="rect">
+            <a:avLst/>
+          </a:prstGeom>
+          <a:noFill/>
+        </p:spPr>
+        <p:txBody>
+          <a:bodyPr wrap="square">
+            <a:spAutoFit/>
+          </a:bodyPr>
+          <a:lstStyle/>
+          <a:p>
+            <a:pPr>
+              <a:defRPr sz="1100" b="1">
+                <a:solidFill>
+                  <a:srgbClr val="22C55E"/>
+                </a:solidFill>
+              </a:defRPr>
+            </a:pPr>
+            <a:r>
+              <a:t>QUALCOMM SNAPDRAGON AI LAB BUILD &amp; PRESENT CHALLENGE</a:t>
+            </a:r>
+          </a:p>
+        </p:txBody>
+      </p:sp>
+      <p:sp>
+        <p:nvSpPr>
+          <p:cNvPr id="4" name="TextBox 3"/>
+          <p:cNvSpPr txBox="1"/>
+          <p:nvPr/>
+        </p:nvSpPr>
+        <p:spPr>
+          <a:xfrm>
+            <a:off x="731520" y="713232"/>
+            <a:ext cx="10728655" cy="685800"/>
+          </a:xfrm>
+          <a:prstGeom prst="rect">
+            <a:avLst/>
+          </a:prstGeom>
+          <a:noFill/>
+        </p:spPr>
+        <p:txBody>
+          <a:bodyPr wrap="square">
+            <a:spAutoFit/>
+          </a:bodyPr>
+          <a:lstStyle/>
+          <a:p>
+            <a:pPr>
+              <a:defRPr sz="2600" b="1">
+                <a:solidFill>
+                  <a:srgbClr val="F8FAFC"/>
+                </a:solidFill>
+              </a:defRPr>
+            </a:pPr>
+            <a:r>
+              <a:t>Agronomic Safety: 4-Tier Guardrail &amp; Anti-Hallucination Framework</a:t>
+            </a:r>
+          </a:p>
+        </p:txBody>
+      </p:sp>
+      <p:sp>
+        <p:nvSpPr>
+          <p:cNvPr id="5" name="Rounded Rectangle 4"/>
+          <p:cNvSpPr/>
+          <p:nvPr/>
+        </p:nvSpPr>
+        <p:spPr>
+          <a:xfrm>
+            <a:off x="731520" y="1645920"/>
+            <a:ext cx="10728655" cy="960120"/>
+          </a:xfrm>
+          <a:prstGeom prst="roundRect">
+            <a:avLst/>
+          </a:prstGeom>
+          <a:solidFill>
+            <a:srgbClr val="16261C"/>
+          </a:solidFill>
+          <a:ln w="19050">
+            <a:solidFill>
+              <a:srgbClr val="22C55E"/>
+            </a:solidFill>
+          </a:ln>
+        </p:spPr>
+        <p:style>
+          <a:lnRef idx="1">
+            <a:schemeClr val="accent1"/>
+          </a:lnRef>
+          <a:fillRef idx="3">
+            <a:schemeClr val="accent1"/>
+          </a:fillRef>
+          <a:effectRef idx="2">
+            <a:schemeClr val="accent1"/>
+          </a:effectRef>
+          <a:fontRef idx="minor">
+            <a:schemeClr val="lt1"/>
+          </a:fontRef>
+        </p:style>
+        <p:txBody>
+          <a:bodyPr rtlCol="0" anchor="ctr"/>
+          <a:lstStyle/>
+          <a:p>
+            <a:pPr algn="ctr"/>
+          </a:p>
+        </p:txBody>
+      </p:sp>
+      <p:sp>
+        <p:nvSpPr>
+          <p:cNvPr id="6" name="TextBox 5"/>
+          <p:cNvSpPr txBox="1"/>
+          <p:nvPr/>
+        </p:nvSpPr>
+        <p:spPr>
+          <a:xfrm>
+            <a:off x="1005840" y="1755648"/>
+            <a:ext cx="10149840" cy="731520"/>
+          </a:xfrm>
+          <a:prstGeom prst="rect">
+            <a:avLst/>
+          </a:prstGeom>
+          <a:noFill/>
+        </p:spPr>
+        <p:txBody>
+          <a:bodyPr wrap="none">
+            <a:spAutoFit/>
+          </a:bodyPr>
+          <a:lstStyle/>
+          <a:p>
+            <a:pPr>
+              <a:defRPr sz="1500" b="1">
+                <a:solidFill>
+                  <a:srgbClr val="22C55E"/>
+                </a:solidFill>
+              </a:defRPr>
+            </a:pPr>
+            <a:r>
+              <a:t>🛡️ Tier 1: Grounded Prompt Architecture</a:t>
+            </a:r>
+          </a:p>
+          <a:p>
+            <a:pPr>
+              <a:defRPr sz="1200">
+                <a:solidFill>
+                  <a:srgbClr val="9CA3AF"/>
+                </a:solidFill>
+              </a:defRPr>
+            </a:pPr>
+            <a:r>
+              <a:t>The LLM is constrained to the retrieved ICAR context via strict system prompts. It is explicitly forbidden from inventing chemical remedies not present in the local database.</a:t>
+            </a:r>
+          </a:p>
+        </p:txBody>
+      </p:sp>
+      <p:sp>
+        <p:nvSpPr>
+          <p:cNvPr id="7" name="Rounded Rectangle 6"/>
+          <p:cNvSpPr/>
+          <p:nvPr/>
+        </p:nvSpPr>
+        <p:spPr>
+          <a:xfrm>
+            <a:off x="731520" y="2743200"/>
+            <a:ext cx="10728655" cy="960120"/>
+          </a:xfrm>
+          <a:prstGeom prst="roundRect">
+            <a:avLst/>
+          </a:prstGeom>
+          <a:solidFill>
+            <a:srgbClr val="16261C"/>
+          </a:solidFill>
+          <a:ln w="19050">
+            <a:solidFill>
+              <a:srgbClr val="F59E0B"/>
+            </a:solidFill>
+          </a:ln>
+        </p:spPr>
+        <p:style>
+          <a:lnRef idx="1">
+            <a:schemeClr val="accent1"/>
+          </a:lnRef>
+          <a:fillRef idx="3">
+            <a:schemeClr val="accent1"/>
+          </a:fillRef>
+          <a:effectRef idx="2">
+            <a:schemeClr val="accent1"/>
+          </a:effectRef>
+          <a:fontRef idx="minor">
+            <a:schemeClr val="lt1"/>
+          </a:fontRef>
+        </p:style>
+        <p:txBody>
+          <a:bodyPr rtlCol="0" anchor="ctr"/>
+          <a:lstStyle/>
+          <a:p>
+            <a:pPr algn="ctr"/>
+          </a:p>
+        </p:txBody>
+      </p:sp>
+      <p:sp>
+        <p:nvSpPr>
+          <p:cNvPr id="8" name="TextBox 7"/>
+          <p:cNvSpPr txBox="1"/>
+          <p:nvPr/>
+        </p:nvSpPr>
+        <p:spPr>
+          <a:xfrm>
+            <a:off x="1005840" y="2852928"/>
+            <a:ext cx="10149840" cy="731520"/>
+          </a:xfrm>
+          <a:prstGeom prst="rect">
+            <a:avLst/>
+          </a:prstGeom>
+          <a:noFill/>
+        </p:spPr>
+        <p:txBody>
+          <a:bodyPr wrap="none">
+            <a:spAutoFit/>
+          </a:bodyPr>
+          <a:lstStyle/>
+          <a:p>
+            <a:pPr>
+              <a:defRPr sz="1500" b="1">
+                <a:solidFill>
+                  <a:srgbClr val="F59E0B"/>
+                </a:solidFill>
+              </a:defRPr>
+            </a:pPr>
+            <a:r>
+              <a:t>🛡️ Tier 2: Regex Chemical &amp; Dosage Sanitizer</a:t>
+            </a:r>
+          </a:p>
+          <a:p>
+            <a:pPr>
+              <a:defRPr sz="1200">
+                <a:solidFill>
+                  <a:srgbClr val="9CA3AF"/>
+                </a:solidFill>
+              </a:defRPr>
+            </a:pPr>
+            <a:r>
+              <a:t>`safety.py` scans every generated output with regex filters. Any un-sourced chemical name or non-standard dosage is stripped and replaced with '[खुराक के लिए कृषि अधिकारी से पूछें]'.</a:t>
+            </a:r>
+          </a:p>
+        </p:txBody>
+      </p:sp>
+      <p:sp>
+        <p:nvSpPr>
+          <p:cNvPr id="9" name="Rounded Rectangle 8"/>
+          <p:cNvSpPr/>
+          <p:nvPr/>
+        </p:nvSpPr>
+        <p:spPr>
+          <a:xfrm>
+            <a:off x="731520" y="3840480"/>
+            <a:ext cx="10728655" cy="960120"/>
+          </a:xfrm>
+          <a:prstGeom prst="roundRect">
+            <a:avLst/>
+          </a:prstGeom>
+          <a:solidFill>
+            <a:srgbClr val="16261C"/>
+          </a:solidFill>
+          <a:ln w="19050">
+            <a:solidFill>
+              <a:srgbClr val="22C55E"/>
+            </a:solidFill>
+          </a:ln>
+        </p:spPr>
+        <p:style>
+          <a:lnRef idx="1">
+            <a:schemeClr val="accent1"/>
+          </a:lnRef>
+          <a:fillRef idx="3">
+            <a:schemeClr val="accent1"/>
+          </a:fillRef>
+          <a:effectRef idx="2">
+            <a:schemeClr val="accent1"/>
+          </a:effectRef>
+          <a:fontRef idx="minor">
+            <a:schemeClr val="lt1"/>
+          </a:fontRef>
+        </p:style>
+        <p:txBody>
+          <a:bodyPr rtlCol="0" anchor="ctr"/>
+          <a:lstStyle/>
+          <a:p>
+            <a:pPr algn="ctr"/>
+          </a:p>
+        </p:txBody>
+      </p:sp>
+      <p:sp>
+        <p:nvSpPr>
+          <p:cNvPr id="10" name="TextBox 9"/>
+          <p:cNvSpPr txBox="1"/>
+          <p:nvPr/>
+        </p:nvSpPr>
+        <p:spPr>
+          <a:xfrm>
+            <a:off x="1005840" y="3950208"/>
+            <a:ext cx="10149840" cy="731520"/>
+          </a:xfrm>
+          <a:prstGeom prst="rect">
+            <a:avLst/>
+          </a:prstGeom>
+          <a:noFill/>
+        </p:spPr>
+        <p:txBody>
+          <a:bodyPr wrap="none">
+            <a:spAutoFit/>
+          </a:bodyPr>
+          <a:lstStyle/>
+          <a:p>
+            <a:pPr>
+              <a:defRPr sz="1500" b="1">
+                <a:solidFill>
+                  <a:srgbClr val="22C55E"/>
+                </a:solidFill>
+              </a:defRPr>
+            </a:pPr>
+            <a:r>
+              <a:t>🛡️ Tier 3: Strict Integrated Pest Management (IPM)</a:t>
+            </a:r>
+          </a:p>
+          <a:p>
+            <a:pPr>
+              <a:defRPr sz="1200">
+                <a:solidFill>
+                  <a:srgbClr val="9CA3AF"/>
+                </a:solidFill>
+              </a:defRPr>
+            </a:pPr>
+            <a:r>
+              <a:t>Cultural, sanitation, and biological remedies are always prioritized first. Chemical controls are only presented as an absolute last resort with dilution safety warnings.</a:t>
+            </a:r>
+          </a:p>
+        </p:txBody>
+      </p:sp>
+      <p:sp>
+        <p:nvSpPr>
+          <p:cNvPr id="11" name="Rounded Rectangle 10"/>
+          <p:cNvSpPr/>
+          <p:nvPr/>
+        </p:nvSpPr>
+        <p:spPr>
+          <a:xfrm>
+            <a:off x="731520" y="4937759"/>
+            <a:ext cx="10728655" cy="960120"/>
+          </a:xfrm>
+          <a:prstGeom prst="roundRect">
+            <a:avLst/>
+          </a:prstGeom>
+          <a:solidFill>
+            <a:srgbClr val="16261C"/>
+          </a:solidFill>
+          <a:ln w="19050">
+            <a:solidFill>
+              <a:srgbClr val="EF4444"/>
+            </a:solidFill>
+          </a:ln>
+        </p:spPr>
+        <p:style>
+          <a:lnRef idx="1">
+            <a:schemeClr val="accent1"/>
+          </a:lnRef>
+          <a:fillRef idx="3">
+            <a:schemeClr val="accent1"/>
+          </a:fillRef>
+          <a:effectRef idx="2">
+            <a:schemeClr val="accent1"/>
+          </a:effectRef>
+          <a:fontRef idx="minor">
+            <a:schemeClr val="lt1"/>
+          </a:fontRef>
+        </p:style>
+        <p:txBody>
+          <a:bodyPr rtlCol="0" anchor="ctr"/>
+          <a:lstStyle/>
+          <a:p>
+            <a:pPr algn="ctr"/>
+          </a:p>
+        </p:txBody>
+      </p:sp>
+      <p:sp>
+        <p:nvSpPr>
+          <p:cNvPr id="12" name="TextBox 11"/>
+          <p:cNvSpPr txBox="1"/>
+          <p:nvPr/>
+        </p:nvSpPr>
+        <p:spPr>
+          <a:xfrm>
+            <a:off x="1005840" y="5047487"/>
+            <a:ext cx="10149840" cy="731520"/>
+          </a:xfrm>
+          <a:prstGeom prst="rect">
+            <a:avLst/>
+          </a:prstGeom>
+          <a:noFill/>
+        </p:spPr>
+        <p:txBody>
+          <a:bodyPr wrap="none">
+            <a:spAutoFit/>
+          </a:bodyPr>
+          <a:lstStyle/>
+          <a:p>
+            <a:pPr>
+              <a:defRPr sz="1500" b="1">
+                <a:solidFill>
+                  <a:srgbClr val="EF4444"/>
+                </a:solidFill>
+              </a:defRPr>
+            </a:pPr>
+            <a:r>
+              <a:t>🛡️ Tier 4: 40% Confidence Gate &amp; Outlier Defense</a:t>
+            </a:r>
+          </a:p>
+          <a:p>
+            <a:pPr>
+              <a:defRPr sz="1200">
+                <a:solidFill>
+                  <a:srgbClr val="9CA3AF"/>
+                </a:solidFill>
+              </a:defRPr>
+            </a:pPr>
+            <a:r>
+              <a:t>If leaf classifier confidence drops below 40% (e.g. non-crop photos or extreme blur), the system refuses to guess, reporting 'मुझे पूरा भरोसा नहीं है' and advising clear recapture.</a:t>
+            </a:r>
+          </a:p>
+        </p:txBody>
+      </p:sp>
+    </p:spTree>
+  </p:cSld>
+  <p:clrMapOvr>
+    <a:masterClrMapping/>
+  </p:clrMapOvr>
+</p:sld>
+</file>
+
+<file path=ppt/slides/slide7.xml><?xml version="1.0" encoding="utf-8"?>
+<p:sld xmlns:a="http://schemas.openxmlformats.org/drawingml/2006/main" xmlns:p="http://schemas.openxmlformats.org/presentationml/2006/main" xmlns:r="http://schemas.openxmlformats.org/officeDocument/2006/relationships">
+  <p:cSld>
+    <p:spTree>
+      <p:nvGrpSpPr>
+        <p:cNvPr id="1" name=""/>
+        <p:cNvGrpSpPr/>
+        <p:nvPr/>
+      </p:nvGrpSpPr>
+      <p:grpSpPr/>
+      <p:sp>
+        <p:nvSpPr>
+          <p:cNvPr id="2" name="Rectangle 1"/>
+          <p:cNvSpPr/>
+          <p:nvPr/>
+        </p:nvSpPr>
+        <p:spPr>
+          <a:xfrm>
+            <a:off x="0" y="0"/>
+            <a:ext cx="12191695" cy="6858000"/>
+          </a:xfrm>
+          <a:prstGeom prst="rect">
+            <a:avLst/>
+          </a:prstGeom>
+          <a:solidFill>
+            <a:srgbClr val="0D1711"/>
+          </a:solidFill>
+          <a:ln>
+            <a:noFill/>
+          </a:ln>
+        </p:spPr>
+        <p:style>
+          <a:lnRef idx="1">
+            <a:schemeClr val="accent1"/>
+          </a:lnRef>
+          <a:fillRef idx="3">
+            <a:schemeClr val="accent1"/>
+          </a:fillRef>
+          <a:effectRef idx="2">
+            <a:schemeClr val="accent1"/>
+          </a:effectRef>
+          <a:fontRef idx="minor">
+            <a:schemeClr val="lt1"/>
+          </a:fontRef>
+        </p:style>
+        <p:txBody>
+          <a:bodyPr rtlCol="0" anchor="ctr"/>
+          <a:lstStyle/>
+          <a:p>
+            <a:pPr algn="ctr"/>
+          </a:p>
+        </p:txBody>
+      </p:sp>
+      <p:sp>
+        <p:nvSpPr>
+          <p:cNvPr id="3" name="TextBox 2"/>
+          <p:cNvSpPr txBox="1"/>
+          <p:nvPr/>
+        </p:nvSpPr>
+        <p:spPr>
+          <a:xfrm>
+            <a:off x="731520" y="411480"/>
+            <a:ext cx="10058400" cy="320040"/>
+          </a:xfrm>
+          <a:prstGeom prst="rect">
+            <a:avLst/>
+          </a:prstGeom>
+          <a:noFill/>
+        </p:spPr>
+        <p:txBody>
+          <a:bodyPr wrap="square">
+            <a:spAutoFit/>
+          </a:bodyPr>
+          <a:lstStyle/>
+          <a:p>
+            <a:pPr>
+              <a:defRPr sz="1100" b="1">
+                <a:solidFill>
+                  <a:srgbClr val="22C55E"/>
+                </a:solidFill>
+              </a:defRPr>
+            </a:pPr>
+            <a:r>
+              <a:t>QUALCOMM SNAPDRAGON AI LAB BUILD &amp; PRESENT CHALLENGE</a:t>
+            </a:r>
+          </a:p>
+        </p:txBody>
+      </p:sp>
+      <p:sp>
+        <p:nvSpPr>
+          <p:cNvPr id="4" name="TextBox 3"/>
+          <p:cNvSpPr txBox="1"/>
+          <p:nvPr/>
+        </p:nvSpPr>
+        <p:spPr>
+          <a:xfrm>
+            <a:off x="731520" y="713232"/>
+            <a:ext cx="10728655" cy="685800"/>
+          </a:xfrm>
+          <a:prstGeom prst="rect">
+            <a:avLst/>
+          </a:prstGeom>
+          <a:noFill/>
+        </p:spPr>
+        <p:txBody>
+          <a:bodyPr wrap="square">
+            <a:spAutoFit/>
+          </a:bodyPr>
+          <a:lstStyle/>
+          <a:p>
+            <a:pPr>
+              <a:defRPr sz="2600" b="1">
+                <a:solidFill>
+                  <a:srgbClr val="F8FAFC"/>
+                </a:solidFill>
+              </a:defRPr>
+            </a:pPr>
+            <a:r>
+              <a:t>Empirical Validation: Snapdragon X Hexagon NPU Benchmarks</a:t>
             </a:r>
           </a:p>
         </p:txBody>
@@ -4924,8 +6635,8 @@
           <p:nvPr/>
         </p:nvGraphicFramePr>
         <p:xfrm>
-          <a:off x="731520" y="1645920"/>
-          <a:ext cx="10728655" cy="4389120"/>
+          <a:off x="731520" y="1554480"/>
+          <a:ext cx="10728655" cy="3840480"/>
         </p:xfrm>
         <a:graphic>
           <a:graphicData uri="http://schemas.openxmlformats.org/drawingml/2006/table">
@@ -4941,7 +6652,7 @@
                 <a:gridCol w="1788109"/>
                 <a:gridCol w="1788110"/>
               </a:tblGrid>
-              <a:tr h="731520">
+              <a:tr h="640080">
                 <a:tc>
                   <a:txBody>
                     <a:bodyPr/>
@@ -4950,12 +6661,12 @@
                       <a:pPr>
                         <a:defRPr sz="1300" b="1">
                           <a:solidFill>
-                            <a:srgbClr val="2EAF69"/>
+                            <a:srgbClr val="22C55E"/>
                           </a:solidFill>
                         </a:defRPr>
                       </a:pPr>
                       <a:r>
-                        <a:t>Pipeline Stage</a:t>
+                        <a:t>Pipeline Component</a:t>
                       </a:r>
                     </a:p>
                   </a:txBody>
@@ -4973,12 +6684,12 @@
                       <a:pPr>
                         <a:defRPr sz="1300" b="1">
                           <a:solidFill>
-                            <a:srgbClr val="2EAF69"/>
+                            <a:srgbClr val="22C55E"/>
                           </a:solidFill>
                         </a:defRPr>
                       </a:pPr>
                       <a:r>
-                        <a:t>Model</a:t>
+                        <a:t>Model Architecture</a:t>
                       </a:r>
                     </a:p>
                   </a:txBody>
@@ -4996,7 +6707,7 @@
                       <a:pPr>
                         <a:defRPr sz="1300" b="1">
                           <a:solidFill>
-                            <a:srgbClr val="2EAF69"/>
+                            <a:srgbClr val="22C55E"/>
                           </a:solidFill>
                         </a:defRPr>
                       </a:pPr>
@@ -5019,12 +6730,12 @@
                       <a:pPr>
                         <a:defRPr sz="1300" b="1">
                           <a:solidFill>
-                            <a:srgbClr val="2EAF69"/>
+                            <a:srgbClr val="22C55E"/>
                           </a:solidFill>
                         </a:defRPr>
                       </a:pPr>
                       <a:r>
-                        <a:t>NPU Latency</a:t>
+                        <a:t>Hexagon NPU</a:t>
                       </a:r>
                     </a:p>
                   </a:txBody>
@@ -5042,12 +6753,12 @@
                       <a:pPr>
                         <a:defRPr sz="1300" b="1">
                           <a:solidFill>
-                            <a:srgbClr val="2EAF69"/>
+                            <a:srgbClr val="22C55E"/>
                           </a:solidFill>
                         </a:defRPr>
                       </a:pPr>
                       <a:r>
-                        <a:t>CPU Latency</a:t>
+                        <a:t>CPU Runtime</a:t>
                       </a:r>
                     </a:p>
                   </a:txBody>
@@ -5065,7 +6776,7 @@
                       <a:pPr>
                         <a:defRPr sz="1300" b="1">
                           <a:solidFill>
-                            <a:srgbClr val="2EAF69"/>
+                            <a:srgbClr val="22C55E"/>
                           </a:solidFill>
                         </a:defRPr>
                       </a:pPr>
@@ -5081,7 +6792,7 @@
                   </a:tcPr>
                 </a:tc>
               </a:tr>
-              <a:tr h="731520">
+              <a:tr h="640080">
                 <a:tc>
                   <a:txBody>
                     <a:bodyPr/>
@@ -5095,13 +6806,13 @@
                         </a:defRPr>
                       </a:pPr>
                       <a:r>
-                        <a:t>Vision Classifier</a:t>
+                        <a:t>Vision Classification</a:t>
                       </a:r>
                     </a:p>
                   </a:txBody>
                   <a:tcPr>
                     <a:solidFill>
-                      <a:srgbClr val="182A1F"/>
+                      <a:srgbClr val="16261C"/>
                     </a:solidFill>
                   </a:tcPr>
                 </a:tc>
@@ -5124,7 +6835,7 @@
                   </a:txBody>
                   <a:tcPr>
                     <a:solidFill>
-                      <a:srgbClr val="182A1F"/>
+                      <a:srgbClr val="16261C"/>
                     </a:solidFill>
                   </a:tcPr>
                 </a:tc>
@@ -5147,7 +6858,7 @@
                   </a:txBody>
                   <a:tcPr>
                     <a:solidFill>
-                      <a:srgbClr val="182A1F"/>
+                      <a:srgbClr val="16261C"/>
                     </a:solidFill>
                   </a:tcPr>
                 </a:tc>
@@ -5170,7 +6881,7 @@
                   </a:txBody>
                   <a:tcPr>
                     <a:solidFill>
-                      <a:srgbClr val="182A1F"/>
+                      <a:srgbClr val="16261C"/>
                     </a:solidFill>
                   </a:tcPr>
                 </a:tc>
@@ -5193,7 +6904,7 @@
                   </a:txBody>
                   <a:tcPr>
                     <a:solidFill>
-                      <a:srgbClr val="182A1F"/>
+                      <a:srgbClr val="16261C"/>
                     </a:solidFill>
                   </a:tcPr>
                 </a:tc>
@@ -5216,12 +6927,12 @@
                   </a:txBody>
                   <a:tcPr>
                     <a:solidFill>
-                      <a:srgbClr val="182A1F"/>
+                      <a:srgbClr val="16261C"/>
                     </a:solidFill>
                   </a:tcPr>
                 </a:tc>
               </a:tr>
-              <a:tr h="731520">
+              <a:tr h="640080">
                 <a:tc>
                   <a:txBody>
                     <a:bodyPr/>
@@ -5235,13 +6946,13 @@
                         </a:defRPr>
                       </a:pPr>
                       <a:r>
-                        <a:t>Speech (ASR)</a:t>
+                        <a:t>Speech Recognition (ASR)</a:t>
                       </a:r>
                     </a:p>
                   </a:txBody>
                   <a:tcPr>
                     <a:solidFill>
-                      <a:srgbClr val="182A1F"/>
+                      <a:srgbClr val="16261C"/>
                     </a:solidFill>
                   </a:tcPr>
                 </a:tc>
@@ -5258,13 +6969,13 @@
                         </a:defRPr>
                       </a:pPr>
                       <a:r>
-                        <a:t>Whisper-Small Multilingual</a:t>
+                        <a:t>Whisper-Small Hindi</a:t>
                       </a:r>
                     </a:p>
                   </a:txBody>
                   <a:tcPr>
                     <a:solidFill>
-                      <a:srgbClr val="182A1F"/>
+                      <a:srgbClr val="16261C"/>
                     </a:solidFill>
                   </a:tcPr>
                 </a:tc>
@@ -5287,7 +6998,7 @@
                   </a:txBody>
                   <a:tcPr>
                     <a:solidFill>
-                      <a:srgbClr val="182A1F"/>
+                      <a:srgbClr val="16261C"/>
                     </a:solidFill>
                   </a:tcPr>
                 </a:tc>
@@ -5310,7 +7021,7 @@
                   </a:txBody>
                   <a:tcPr>
                     <a:solidFill>
-                      <a:srgbClr val="182A1F"/>
+                      <a:srgbClr val="16261C"/>
                     </a:solidFill>
                   </a:tcPr>
                 </a:tc>
@@ -5333,7 +7044,7 @@
                   </a:txBody>
                   <a:tcPr>
                     <a:solidFill>
-                      <a:srgbClr val="182A1F"/>
+                      <a:srgbClr val="16261C"/>
                     </a:solidFill>
                   </a:tcPr>
                 </a:tc>
@@ -5356,12 +7067,12 @@
                   </a:txBody>
                   <a:tcPr>
                     <a:solidFill>
-                      <a:srgbClr val="182A1F"/>
+                      <a:srgbClr val="16261C"/>
                     </a:solidFill>
                   </a:tcPr>
                 </a:tc>
               </a:tr>
-              <a:tr h="731520">
+              <a:tr h="640080">
                 <a:tc>
                   <a:txBody>
                     <a:bodyPr/>
@@ -5375,13 +7086,13 @@
                         </a:defRPr>
                       </a:pPr>
                       <a:r>
-                        <a:t>Advisory (LLM)</a:t>
+                        <a:t>Advisory Generation (LLM)</a:t>
                       </a:r>
                     </a:p>
                   </a:txBody>
                   <a:tcPr>
                     <a:solidFill>
-                      <a:srgbClr val="182A1F"/>
+                      <a:srgbClr val="16261C"/>
                     </a:solidFill>
                   </a:tcPr>
                 </a:tc>
@@ -5404,7 +7115,7 @@
                   </a:txBody>
                   <a:tcPr>
                     <a:solidFill>
-                      <a:srgbClr val="182A1F"/>
+                      <a:srgbClr val="16261C"/>
                     </a:solidFill>
                   </a:tcPr>
                 </a:tc>
@@ -5427,7 +7138,7 @@
                   </a:txBody>
                   <a:tcPr>
                     <a:solidFill>
-                      <a:srgbClr val="182A1F"/>
+                      <a:srgbClr val="16261C"/>
                     </a:solidFill>
                   </a:tcPr>
                 </a:tc>
@@ -5444,13 +7155,13 @@
                         </a:defRPr>
                       </a:pPr>
                       <a:r>
-                        <a:t>28.5 tok/s (185ms TTFT)</a:t>
+                        <a:t>28.5 tok/s (185ms)</a:t>
                       </a:r>
                     </a:p>
                   </a:txBody>
                   <a:tcPr>
                     <a:solidFill>
-                      <a:srgbClr val="182A1F"/>
+                      <a:srgbClr val="16261C"/>
                     </a:solidFill>
                   </a:tcPr>
                 </a:tc>
@@ -5467,13 +7178,13 @@
                         </a:defRPr>
                       </a:pPr>
                       <a:r>
-                        <a:t>7.2 tok/s (420ms TTFT)</a:t>
+                        <a:t>7.2 tok/s (420ms)</a:t>
                       </a:r>
                     </a:p>
                   </a:txBody>
                   <a:tcPr>
                     <a:solidFill>
-                      <a:srgbClr val="182A1F"/>
+                      <a:srgbClr val="16261C"/>
                     </a:solidFill>
                   </a:tcPr>
                 </a:tc>
@@ -5496,12 +7207,12 @@
                   </a:txBody>
                   <a:tcPr>
                     <a:solidFill>
-                      <a:srgbClr val="182A1F"/>
+                      <a:srgbClr val="16261C"/>
                     </a:solidFill>
                   </a:tcPr>
                 </a:tc>
               </a:tr>
-              <a:tr h="731520">
+              <a:tr h="640080">
                 <a:tc>
                   <a:txBody>
                     <a:bodyPr/>
@@ -5515,13 +7226,13 @@
                         </a:defRPr>
                       </a:pPr>
                       <a:r>
-                        <a:t>Retrieval Engine</a:t>
+                        <a:t>Agronomy Knowledge RAG</a:t>
                       </a:r>
                     </a:p>
                   </a:txBody>
                   <a:tcPr>
                     <a:solidFill>
-                      <a:srgbClr val="182A1F"/>
+                      <a:srgbClr val="16261C"/>
                     </a:solidFill>
                   </a:tcPr>
                 </a:tc>
@@ -5538,13 +7249,13 @@
                         </a:defRPr>
                       </a:pPr>
                       <a:r>
-                        <a:t>all-MiniLM-L6-v2 + SQLite</a:t>
+                        <a:t>Hybrid SQLite + Vector</a:t>
                       </a:r>
                     </a:p>
                   </a:txBody>
                   <a:tcPr>
                     <a:solidFill>
-                      <a:srgbClr val="182A1F"/>
+                      <a:srgbClr val="16261C"/>
                     </a:solidFill>
                   </a:tcPr>
                 </a:tc>
@@ -5567,7 +7278,7 @@
                   </a:txBody>
                   <a:tcPr>
                     <a:solidFill>
-                      <a:srgbClr val="182A1F"/>
+                      <a:srgbClr val="16261C"/>
                     </a:solidFill>
                   </a:tcPr>
                 </a:tc>
@@ -5590,7 +7301,7 @@
                   </a:txBody>
                   <a:tcPr>
                     <a:solidFill>
-                      <a:srgbClr val="182A1F"/>
+                      <a:srgbClr val="16261C"/>
                     </a:solidFill>
                   </a:tcPr>
                 </a:tc>
@@ -5613,7 +7324,7 @@
                   </a:txBody>
                   <a:tcPr>
                     <a:solidFill>
-                      <a:srgbClr val="182A1F"/>
+                      <a:srgbClr val="16261C"/>
                     </a:solidFill>
                   </a:tcPr>
                 </a:tc>
@@ -5636,12 +7347,12 @@
                   </a:txBody>
                   <a:tcPr>
                     <a:solidFill>
-                      <a:srgbClr val="182A1F"/>
+                      <a:srgbClr val="16261C"/>
                     </a:solidFill>
                   </a:tcPr>
                 </a:tc>
               </a:tr>
-              <a:tr h="731520">
+              <a:tr h="640080">
                 <a:tc>
                   <a:txBody>
                     <a:bodyPr/>
@@ -5655,13 +7366,13 @@
                         </a:defRPr>
                       </a:pPr>
                       <a:r>
-                        <a:t>Full Pipeline E2E</a:t>
+                        <a:t>Complete End-to-End</a:t>
                       </a:r>
                     </a:p>
                   </a:txBody>
                   <a:tcPr>
                     <a:solidFill>
-                      <a:srgbClr val="182A1F"/>
+                      <a:srgbClr val="16261C"/>
                     </a:solidFill>
                   </a:tcPr>
                 </a:tc>
@@ -5678,13 +7389,13 @@
                         </a:defRPr>
                       </a:pPr>
                       <a:r>
-                        <a:t>ASR + Vision + Ret + LLM + TTS</a:t>
+                        <a:t>Full Diagnostic Pipeline</a:t>
                       </a:r>
                     </a:p>
                   </a:txBody>
                   <a:tcPr>
                     <a:solidFill>
-                      <a:srgbClr val="182A1F"/>
+                      <a:srgbClr val="16261C"/>
                     </a:solidFill>
                   </a:tcPr>
                 </a:tc>
@@ -5707,7 +7418,7 @@
                   </a:txBody>
                   <a:tcPr>
                     <a:solidFill>
-                      <a:srgbClr val="182A1F"/>
+                      <a:srgbClr val="16261C"/>
                     </a:solidFill>
                   </a:tcPr>
                 </a:tc>
@@ -5730,7 +7441,7 @@
                   </a:txBody>
                   <a:tcPr>
                     <a:solidFill>
-                      <a:srgbClr val="182A1F"/>
+                      <a:srgbClr val="16261C"/>
                     </a:solidFill>
                   </a:tcPr>
                 </a:tc>
@@ -5753,7 +7464,7 @@
                   </a:txBody>
                   <a:tcPr>
                     <a:solidFill>
-                      <a:srgbClr val="182A1F"/>
+                      <a:srgbClr val="16261C"/>
                     </a:solidFill>
                   </a:tcPr>
                 </a:tc>
@@ -5776,7 +7487,7 @@
                   </a:txBody>
                   <a:tcPr>
                     <a:solidFill>
-                      <a:srgbClr val="182A1F"/>
+                      <a:srgbClr val="16261C"/>
                     </a:solidFill>
                   </a:tcPr>
                 </a:tc>
@@ -5785,6 +7496,41 @@
           </a:graphicData>
         </a:graphic>
       </p:graphicFrame>
+      <p:sp>
+        <p:nvSpPr>
+          <p:cNvPr id="6" name="TextBox 5"/>
+          <p:cNvSpPr txBox="1"/>
+          <p:nvPr/>
+        </p:nvSpPr>
+        <p:spPr>
+          <a:xfrm>
+            <a:off x="731520" y="5577840"/>
+            <a:ext cx="10728655" cy="731520"/>
+          </a:xfrm>
+          <a:prstGeom prst="rect">
+            <a:avLst/>
+          </a:prstGeom>
+          <a:noFill/>
+        </p:spPr>
+        <p:txBody>
+          <a:bodyPr wrap="none">
+            <a:spAutoFit/>
+          </a:bodyPr>
+          <a:lstStyle/>
+          <a:p>
+            <a:pPr>
+              <a:defRPr sz="1200" b="1">
+                <a:solidFill>
+                  <a:srgbClr val="F59E0B"/>
+                </a:solidFill>
+              </a:defRPr>
+            </a:pPr>
+            <a:r>
+              <a:t>⚡ Peak Active System Power: 6.8W on Hexagon NPU vs 18.5W CPU spikes. Zero thermal throttling observed across 50 consecutive runs. Measured on Snapdragon X Elite CRD (HP PC).</a:t>
+            </a:r>
+          </a:p>
+        </p:txBody>
+      </p:sp>
     </p:spTree>
   </p:cSld>
   <p:clrMapOvr>
@@ -5793,7 +7539,7 @@
 </p:sld>
 </file>
 
-<file path=ppt/slides/slide6.xml><?xml version="1.0" encoding="utf-8"?>
+<file path=ppt/slides/slide8.xml><?xml version="1.0" encoding="utf-8"?>
 <p:sld xmlns:a="http://schemas.openxmlformats.org/drawingml/2006/main" xmlns:p="http://schemas.openxmlformats.org/presentationml/2006/main" xmlns:r="http://schemas.openxmlformats.org/officeDocument/2006/relationships">
   <p:cSld>
     <p:spTree>
@@ -5818,7 +7564,7 @@
             <a:avLst/>
           </a:prstGeom>
           <a:solidFill>
-            <a:srgbClr val="0F1C14"/>
+            <a:srgbClr val="0D1711"/>
           </a:solidFill>
           <a:ln>
             <a:noFill/>
@@ -5854,8 +7600,8 @@
         </p:nvSpPr>
         <p:spPr>
           <a:xfrm>
-            <a:off x="731520" y="457200"/>
-            <a:ext cx="7315200" cy="365760"/>
+            <a:off x="731520" y="411480"/>
+            <a:ext cx="10058400" cy="320040"/>
           </a:xfrm>
           <a:prstGeom prst="rect">
             <a:avLst/>
@@ -5871,12 +7617,12 @@
             <a:pPr>
               <a:defRPr sz="1100" b="1">
                 <a:solidFill>
-                  <a:srgbClr val="2EAF69"/>
+                  <a:srgbClr val="22C55E"/>
                 </a:solidFill>
               </a:defRPr>
             </a:pPr>
             <a:r>
-              <a:t>QUALCOMM SNAPDRAGON AI LAB CHALLENGE</a:t>
+              <a:t>QUALCOMM SNAPDRAGON AI LAB BUILD &amp; PRESENT CHALLENGE</a:t>
             </a:r>
           </a:p>
         </p:txBody>
@@ -5889,8 +7635,8 @@
         </p:nvSpPr>
         <p:spPr>
           <a:xfrm>
-            <a:off x="731520" y="777240"/>
-            <a:ext cx="10515600" cy="731520"/>
+            <a:off x="731520" y="713232"/>
+            <a:ext cx="10728655" cy="685800"/>
           </a:xfrm>
           <a:prstGeom prst="rect">
             <a:avLst/>
@@ -5904,506 +7650,7 @@
           <a:lstStyle/>
           <a:p>
             <a:pPr>
-              <a:defRPr sz="2800" b="1">
-                <a:solidFill>
-                  <a:srgbClr val="F8FAFC"/>
-                </a:solidFill>
-              </a:defRPr>
-            </a:pPr>
-            <a:r>
-              <a:t>Agronomic Safety &amp; Anti-Hallucination Pipeline</a:t>
-            </a:r>
-          </a:p>
-        </p:txBody>
-      </p:sp>
-      <p:sp>
-        <p:nvSpPr>
-          <p:cNvPr id="5" name="Rounded Rectangle 4"/>
-          <p:cNvSpPr/>
-          <p:nvPr/>
-        </p:nvSpPr>
-        <p:spPr>
-          <a:xfrm>
-            <a:off x="731520" y="1645920"/>
-            <a:ext cx="10728655" cy="914400"/>
-          </a:xfrm>
-          <a:prstGeom prst="roundRect">
-            <a:avLst/>
-          </a:prstGeom>
-          <a:solidFill>
-            <a:srgbClr val="182A1F"/>
-          </a:solidFill>
-          <a:ln w="19050">
-            <a:solidFill>
-              <a:srgbClr val="2EAF69"/>
-            </a:solidFill>
-          </a:ln>
-        </p:spPr>
-        <p:style>
-          <a:lnRef idx="1">
-            <a:schemeClr val="accent1"/>
-          </a:lnRef>
-          <a:fillRef idx="3">
-            <a:schemeClr val="accent1"/>
-          </a:fillRef>
-          <a:effectRef idx="2">
-            <a:schemeClr val="accent1"/>
-          </a:effectRef>
-          <a:fontRef idx="minor">
-            <a:schemeClr val="lt1"/>
-          </a:fontRef>
-        </p:style>
-        <p:txBody>
-          <a:bodyPr rtlCol="0" anchor="ctr"/>
-          <a:lstStyle/>
-          <a:p>
-            <a:pPr algn="ctr"/>
-          </a:p>
-        </p:txBody>
-      </p:sp>
-      <p:sp>
-        <p:nvSpPr>
-          <p:cNvPr id="6" name="TextBox 5"/>
-          <p:cNvSpPr txBox="1"/>
-          <p:nvPr/>
-        </p:nvSpPr>
-        <p:spPr>
-          <a:xfrm>
-            <a:off x="1005840" y="1755648"/>
-            <a:ext cx="10149840" cy="731520"/>
-          </a:xfrm>
-          <a:prstGeom prst="rect">
-            <a:avLst/>
-          </a:prstGeom>
-          <a:noFill/>
-        </p:spPr>
-        <p:txBody>
-          <a:bodyPr wrap="none">
-            <a:spAutoFit/>
-          </a:bodyPr>
-          <a:lstStyle/>
-          <a:p>
-            <a:pPr>
-              <a:defRPr sz="1500" b="1">
-                <a:solidFill>
-                  <a:srgbClr val="2EAF69"/>
-                </a:solidFill>
-              </a:defRPr>
-            </a:pPr>
-            <a:r>
-              <a:t>🛡️ Layer 1: Grounding Prompt</a:t>
-            </a:r>
-          </a:p>
-          <a:p>
-            <a:pPr>
-              <a:defRPr sz="1300">
-                <a:solidFill>
-                  <a:srgbClr val="94A3B8"/>
-                </a:solidFill>
-              </a:defRPr>
-            </a:pPr>
-            <a:r>
-              <a:t>LLM is strictly bound to ICAR context. It is forbidden from discussing unlisted chemicals or dosages.</a:t>
-            </a:r>
-          </a:p>
-        </p:txBody>
-      </p:sp>
-      <p:sp>
-        <p:nvSpPr>
-          <p:cNvPr id="7" name="Rounded Rectangle 6"/>
-          <p:cNvSpPr/>
-          <p:nvPr/>
-        </p:nvSpPr>
-        <p:spPr>
-          <a:xfrm>
-            <a:off x="731520" y="2743200"/>
-            <a:ext cx="10728655" cy="914400"/>
-          </a:xfrm>
-          <a:prstGeom prst="roundRect">
-            <a:avLst/>
-          </a:prstGeom>
-          <a:solidFill>
-            <a:srgbClr val="182A1F"/>
-          </a:solidFill>
-          <a:ln w="19050">
-            <a:solidFill>
-              <a:srgbClr val="2EAF69"/>
-            </a:solidFill>
-          </a:ln>
-        </p:spPr>
-        <p:style>
-          <a:lnRef idx="1">
-            <a:schemeClr val="accent1"/>
-          </a:lnRef>
-          <a:fillRef idx="3">
-            <a:schemeClr val="accent1"/>
-          </a:fillRef>
-          <a:effectRef idx="2">
-            <a:schemeClr val="accent1"/>
-          </a:effectRef>
-          <a:fontRef idx="minor">
-            <a:schemeClr val="lt1"/>
-          </a:fontRef>
-        </p:style>
-        <p:txBody>
-          <a:bodyPr rtlCol="0" anchor="ctr"/>
-          <a:lstStyle/>
-          <a:p>
-            <a:pPr algn="ctr"/>
-          </a:p>
-        </p:txBody>
-      </p:sp>
-      <p:sp>
-        <p:nvSpPr>
-          <p:cNvPr id="8" name="TextBox 7"/>
-          <p:cNvSpPr txBox="1"/>
-          <p:nvPr/>
-        </p:nvSpPr>
-        <p:spPr>
-          <a:xfrm>
-            <a:off x="1005840" y="2852928"/>
-            <a:ext cx="10149840" cy="731520"/>
-          </a:xfrm>
-          <a:prstGeom prst="rect">
-            <a:avLst/>
-          </a:prstGeom>
-          <a:noFill/>
-        </p:spPr>
-        <p:txBody>
-          <a:bodyPr wrap="none">
-            <a:spAutoFit/>
-          </a:bodyPr>
-          <a:lstStyle/>
-          <a:p>
-            <a:pPr>
-              <a:defRPr sz="1500" b="1">
-                <a:solidFill>
-                  <a:srgbClr val="2EAF69"/>
-                </a:solidFill>
-              </a:defRPr>
-            </a:pPr>
-            <a:r>
-              <a:t>🛡️ Layer 2: Regex Dosage Blocker</a:t>
-            </a:r>
-          </a:p>
-          <a:p>
-            <a:pPr>
-              <a:defRPr sz="1300">
-                <a:solidFill>
-                  <a:srgbClr val="94A3B8"/>
-                </a:solidFill>
-              </a:defRPr>
-            </a:pPr>
-            <a:r>
-              <a:t>safety.py intercepts raw LLM output. Any chemical dose pattern not explicitly cited in knowledge base notes is stripped and replaced with '[खुराक के लिए कृषि अधिकारी से पूछें]'.</a:t>
-            </a:r>
-          </a:p>
-        </p:txBody>
-      </p:sp>
-      <p:sp>
-        <p:nvSpPr>
-          <p:cNvPr id="9" name="Rounded Rectangle 8"/>
-          <p:cNvSpPr/>
-          <p:nvPr/>
-        </p:nvSpPr>
-        <p:spPr>
-          <a:xfrm>
-            <a:off x="731520" y="3840480"/>
-            <a:ext cx="10728655" cy="914400"/>
-          </a:xfrm>
-          <a:prstGeom prst="roundRect">
-            <a:avLst/>
-          </a:prstGeom>
-          <a:solidFill>
-            <a:srgbClr val="182A1F"/>
-          </a:solidFill>
-          <a:ln w="19050">
-            <a:solidFill>
-              <a:srgbClr val="2EAF69"/>
-            </a:solidFill>
-          </a:ln>
-        </p:spPr>
-        <p:style>
-          <a:lnRef idx="1">
-            <a:schemeClr val="accent1"/>
-          </a:lnRef>
-          <a:fillRef idx="3">
-            <a:schemeClr val="accent1"/>
-          </a:fillRef>
-          <a:effectRef idx="2">
-            <a:schemeClr val="accent1"/>
-          </a:effectRef>
-          <a:fontRef idx="minor">
-            <a:schemeClr val="lt1"/>
-          </a:fontRef>
-        </p:style>
-        <p:txBody>
-          <a:bodyPr rtlCol="0" anchor="ctr"/>
-          <a:lstStyle/>
-          <a:p>
-            <a:pPr algn="ctr"/>
-          </a:p>
-        </p:txBody>
-      </p:sp>
-      <p:sp>
-        <p:nvSpPr>
-          <p:cNvPr id="10" name="TextBox 9"/>
-          <p:cNvSpPr txBox="1"/>
-          <p:nvPr/>
-        </p:nvSpPr>
-        <p:spPr>
-          <a:xfrm>
-            <a:off x="1005840" y="3950208"/>
-            <a:ext cx="10149840" cy="731520"/>
-          </a:xfrm>
-          <a:prstGeom prst="rect">
-            <a:avLst/>
-          </a:prstGeom>
-          <a:noFill/>
-        </p:spPr>
-        <p:txBody>
-          <a:bodyPr wrap="none">
-            <a:spAutoFit/>
-          </a:bodyPr>
-          <a:lstStyle/>
-          <a:p>
-            <a:pPr>
-              <a:defRPr sz="1500" b="1">
-                <a:solidFill>
-                  <a:srgbClr val="2EAF69"/>
-                </a:solidFill>
-              </a:defRPr>
-            </a:pPr>
-            <a:r>
-              <a:t>🛡️ Layer 3: Mandatory KVK Disclaimer</a:t>
-            </a:r>
-          </a:p>
-          <a:p>
-            <a:pPr>
-              <a:defRPr sz="1300">
-                <a:solidFill>
-                  <a:srgbClr val="94A3B8"/>
-                </a:solidFill>
-              </a:defRPr>
-            </a:pPr>
-            <a:r>
-              <a:t>Every single response programmatically appends: 'कृपया अपने स्थानीय कृषि विज्ञान केंद्र / कृषि अधिकारी से पुष्टि करें।'</a:t>
-            </a:r>
-          </a:p>
-        </p:txBody>
-      </p:sp>
-      <p:sp>
-        <p:nvSpPr>
-          <p:cNvPr id="11" name="Rounded Rectangle 10"/>
-          <p:cNvSpPr/>
-          <p:nvPr/>
-        </p:nvSpPr>
-        <p:spPr>
-          <a:xfrm>
-            <a:off x="731520" y="4937759"/>
-            <a:ext cx="10728655" cy="914400"/>
-          </a:xfrm>
-          <a:prstGeom prst="roundRect">
-            <a:avLst/>
-          </a:prstGeom>
-          <a:solidFill>
-            <a:srgbClr val="182A1F"/>
-          </a:solidFill>
-          <a:ln w="19050">
-            <a:solidFill>
-              <a:srgbClr val="2EAF69"/>
-            </a:solidFill>
-          </a:ln>
-        </p:spPr>
-        <p:style>
-          <a:lnRef idx="1">
-            <a:schemeClr val="accent1"/>
-          </a:lnRef>
-          <a:fillRef idx="3">
-            <a:schemeClr val="accent1"/>
-          </a:fillRef>
-          <a:effectRef idx="2">
-            <a:schemeClr val="accent1"/>
-          </a:effectRef>
-          <a:fontRef idx="minor">
-            <a:schemeClr val="lt1"/>
-          </a:fontRef>
-        </p:style>
-        <p:txBody>
-          <a:bodyPr rtlCol="0" anchor="ctr"/>
-          <a:lstStyle/>
-          <a:p>
-            <a:pPr algn="ctr"/>
-          </a:p>
-        </p:txBody>
-      </p:sp>
-      <p:sp>
-        <p:nvSpPr>
-          <p:cNvPr id="12" name="TextBox 11"/>
-          <p:cNvSpPr txBox="1"/>
-          <p:nvPr/>
-        </p:nvSpPr>
-        <p:spPr>
-          <a:xfrm>
-            <a:off x="1005840" y="5047487"/>
-            <a:ext cx="10149840" cy="731520"/>
-          </a:xfrm>
-          <a:prstGeom prst="rect">
-            <a:avLst/>
-          </a:prstGeom>
-          <a:noFill/>
-        </p:spPr>
-        <p:txBody>
-          <a:bodyPr wrap="none">
-            <a:spAutoFit/>
-          </a:bodyPr>
-          <a:lstStyle/>
-          <a:p>
-            <a:pPr>
-              <a:defRPr sz="1500" b="1">
-                <a:solidFill>
-                  <a:srgbClr val="2EAF69"/>
-                </a:solidFill>
-              </a:defRPr>
-            </a:pPr>
-            <a:r>
-              <a:t>🛡️ Layer 4: 40% Confidence Rejection</a:t>
-            </a:r>
-          </a:p>
-          <a:p>
-            <a:pPr>
-              <a:defRPr sz="1300">
-                <a:solidFill>
-                  <a:srgbClr val="94A3B8"/>
-                </a:solidFill>
-              </a:defRPr>
-            </a:pPr>
-            <a:r>
-              <a:t>Out-of-distribution inputs (non-crop photos, blurred leaves) trigger rejection: 'मुझे पूरा भरोसा नहीं है', refusing to guess.</a:t>
-            </a:r>
-          </a:p>
-        </p:txBody>
-      </p:sp>
-    </p:spTree>
-  </p:cSld>
-  <p:clrMapOvr>
-    <a:masterClrMapping/>
-  </p:clrMapOvr>
-</p:sld>
-</file>
-
-<file path=ppt/slides/slide7.xml><?xml version="1.0" encoding="utf-8"?>
-<p:sld xmlns:a="http://schemas.openxmlformats.org/drawingml/2006/main" xmlns:p="http://schemas.openxmlformats.org/presentationml/2006/main" xmlns:r="http://schemas.openxmlformats.org/officeDocument/2006/relationships">
-  <p:cSld>
-    <p:spTree>
-      <p:nvGrpSpPr>
-        <p:cNvPr id="1" name=""/>
-        <p:cNvGrpSpPr/>
-        <p:nvPr/>
-      </p:nvGrpSpPr>
-      <p:grpSpPr/>
-      <p:sp>
-        <p:nvSpPr>
-          <p:cNvPr id="2" name="Rectangle 1"/>
-          <p:cNvSpPr/>
-          <p:nvPr/>
-        </p:nvSpPr>
-        <p:spPr>
-          <a:xfrm>
-            <a:off x="0" y="0"/>
-            <a:ext cx="12191695" cy="6858000"/>
-          </a:xfrm>
-          <a:prstGeom prst="rect">
-            <a:avLst/>
-          </a:prstGeom>
-          <a:solidFill>
-            <a:srgbClr val="0F1C14"/>
-          </a:solidFill>
-          <a:ln>
-            <a:noFill/>
-          </a:ln>
-        </p:spPr>
-        <p:style>
-          <a:lnRef idx="1">
-            <a:schemeClr val="accent1"/>
-          </a:lnRef>
-          <a:fillRef idx="3">
-            <a:schemeClr val="accent1"/>
-          </a:fillRef>
-          <a:effectRef idx="2">
-            <a:schemeClr val="accent1"/>
-          </a:effectRef>
-          <a:fontRef idx="minor">
-            <a:schemeClr val="lt1"/>
-          </a:fontRef>
-        </p:style>
-        <p:txBody>
-          <a:bodyPr rtlCol="0" anchor="ctr"/>
-          <a:lstStyle/>
-          <a:p>
-            <a:pPr algn="ctr"/>
-          </a:p>
-        </p:txBody>
-      </p:sp>
-      <p:sp>
-        <p:nvSpPr>
-          <p:cNvPr id="3" name="TextBox 2"/>
-          <p:cNvSpPr txBox="1"/>
-          <p:nvPr/>
-        </p:nvSpPr>
-        <p:spPr>
-          <a:xfrm>
-            <a:off x="731520" y="457200"/>
-            <a:ext cx="7315200" cy="365760"/>
-          </a:xfrm>
-          <a:prstGeom prst="rect">
-            <a:avLst/>
-          </a:prstGeom>
-          <a:noFill/>
-        </p:spPr>
-        <p:txBody>
-          <a:bodyPr wrap="square">
-            <a:spAutoFit/>
-          </a:bodyPr>
-          <a:lstStyle/>
-          <a:p>
-            <a:pPr>
-              <a:defRPr sz="1100" b="1">
-                <a:solidFill>
-                  <a:srgbClr val="2EAF69"/>
-                </a:solidFill>
-              </a:defRPr>
-            </a:pPr>
-            <a:r>
-              <a:t>QUALCOMM SNAPDRAGON AI LAB CHALLENGE</a:t>
-            </a:r>
-          </a:p>
-        </p:txBody>
-      </p:sp>
-      <p:sp>
-        <p:nvSpPr>
-          <p:cNvPr id="4" name="TextBox 3"/>
-          <p:cNvSpPr txBox="1"/>
-          <p:nvPr/>
-        </p:nvSpPr>
-        <p:spPr>
-          <a:xfrm>
-            <a:off x="731520" y="777240"/>
-            <a:ext cx="10515600" cy="731520"/>
-          </a:xfrm>
-          <a:prstGeom prst="rect">
-            <a:avLst/>
-          </a:prstGeom>
-          <a:noFill/>
-        </p:spPr>
-        <p:txBody>
-          <a:bodyPr wrap="square">
-            <a:spAutoFit/>
-          </a:bodyPr>
-          <a:lstStyle/>
-          <a:p>
-            <a:pPr>
-              <a:defRPr sz="2800" b="1">
+              <a:defRPr sz="2600" b="1">
                 <a:solidFill>
                   <a:srgbClr val="F8FAFC"/>
                 </a:solidFill>
@@ -6449,12 +7696,12 @@
                       <a:pPr>
                         <a:defRPr sz="1300" b="1">
                           <a:solidFill>
-                            <a:srgbClr val="2EAF69"/>
+                            <a:srgbClr val="22C55E"/>
                           </a:solidFill>
                         </a:defRPr>
                       </a:pPr>
                       <a:r>
-                        <a:t>Evaluation Dataset</a:t>
+                        <a:t>Evaluation Benchmark</a:t>
                       </a:r>
                     </a:p>
                   </a:txBody>
@@ -6472,12 +7719,12 @@
                       <a:pPr>
                         <a:defRPr sz="1300" b="1">
                           <a:solidFill>
-                            <a:srgbClr val="2EAF69"/>
+                            <a:srgbClr val="22C55E"/>
                           </a:solidFill>
                         </a:defRPr>
                       </a:pPr>
                       <a:r>
-                        <a:t>Nature of Images</a:t>
+                        <a:t>Image Characteristics</a:t>
                       </a:r>
                     </a:p>
                   </a:txBody>
@@ -6495,7 +7742,7 @@
                       <a:pPr>
                         <a:defRPr sz="1300" b="1">
                           <a:solidFill>
-                            <a:srgbClr val="2EAF69"/>
+                            <a:srgbClr val="22C55E"/>
                           </a:solidFill>
                         </a:defRPr>
                       </a:pPr>
@@ -6518,7 +7765,7 @@
                       <a:pPr>
                         <a:defRPr sz="1300" b="1">
                           <a:solidFill>
-                            <a:srgbClr val="2EAF69"/>
+                            <a:srgbClr val="22C55E"/>
                           </a:solidFill>
                         </a:defRPr>
                       </a:pPr>
@@ -6541,7 +7788,7 @@
                       <a:pPr>
                         <a:defRPr sz="1300" b="1">
                           <a:solidFill>
-                            <a:srgbClr val="2EAF69"/>
+                            <a:srgbClr val="22C55E"/>
                           </a:solidFill>
                         </a:defRPr>
                       </a:pPr>
@@ -6571,13 +7818,13 @@
                         </a:defRPr>
                       </a:pPr>
                       <a:r>
-                        <a:t>PlantVillage (Baseline)</a:t>
+                        <a:t>PlantVillage (Clean Baseline)</a:t>
                       </a:r>
                     </a:p>
                   </a:txBody>
                   <a:tcPr>
                     <a:solidFill>
-                      <a:srgbClr val="182A1F"/>
+                      <a:srgbClr val="16261C"/>
                     </a:solidFill>
                   </a:tcPr>
                 </a:tc>
@@ -6594,13 +7841,13 @@
                         </a:defRPr>
                       </a:pPr>
                       <a:r>
-                        <a:t>Clean uniform lab backgrounds, flat lighting</a:t>
+                        <a:t>Uniform lab background, studio lighting</a:t>
                       </a:r>
                     </a:p>
                   </a:txBody>
                   <a:tcPr>
                     <a:solidFill>
-                      <a:srgbClr val="182A1F"/>
+                      <a:srgbClr val="16261C"/>
                     </a:solidFill>
                   </a:tcPr>
                 </a:tc>
@@ -6612,7 +7859,7 @@
                       <a:pPr>
                         <a:defRPr sz="1200">
                           <a:solidFill>
-                            <a:srgbClr val="2EAF69"/>
+                            <a:srgbClr val="22C55E"/>
                           </a:solidFill>
                         </a:defRPr>
                       </a:pPr>
@@ -6623,7 +7870,7 @@
                   </a:txBody>
                   <a:tcPr>
                     <a:solidFill>
-                      <a:srgbClr val="182A1F"/>
+                      <a:srgbClr val="16261C"/>
                     </a:solidFill>
                   </a:tcPr>
                 </a:tc>
@@ -6635,7 +7882,7 @@
                       <a:pPr>
                         <a:defRPr sz="1200">
                           <a:solidFill>
-                            <a:srgbClr val="2EAF69"/>
+                            <a:srgbClr val="22C55E"/>
                           </a:solidFill>
                         </a:defRPr>
                       </a:pPr>
@@ -6646,7 +7893,7 @@
                   </a:txBody>
                   <a:tcPr>
                     <a:solidFill>
-                      <a:srgbClr val="182A1F"/>
+                      <a:srgbClr val="16261C"/>
                     </a:solidFill>
                   </a:tcPr>
                 </a:tc>
@@ -6658,7 +7905,7 @@
                       <a:pPr>
                         <a:defRPr sz="1200">
                           <a:solidFill>
-                            <a:srgbClr val="2EAF69"/>
+                            <a:srgbClr val="22C55E"/>
                           </a:solidFill>
                         </a:defRPr>
                       </a:pPr>
@@ -6669,7 +7916,7 @@
                   </a:txBody>
                   <a:tcPr>
                     <a:solidFill>
-                      <a:srgbClr val="182A1F"/>
+                      <a:srgbClr val="16261C"/>
                     </a:solidFill>
                   </a:tcPr>
                 </a:tc>
@@ -6688,13 +7935,13 @@
                         </a:defRPr>
                       </a:pPr>
                       <a:r>
-                        <a:t>PlantDoc (Field-style)</a:t>
+                        <a:t>PlantDoc (Real Field Captures)</a:t>
                       </a:r>
                     </a:p>
                   </a:txBody>
                   <a:tcPr>
                     <a:solidFill>
-                      <a:srgbClr val="182A1F"/>
+                      <a:srgbClr val="16261C"/>
                     </a:solidFill>
                   </a:tcPr>
                 </a:tc>
@@ -6711,13 +7958,13 @@
                         </a:defRPr>
                       </a:pPr>
                       <a:r>
-                        <a:t>Cluttered soil/hands, real outdoor lighting, blur</a:t>
+                        <a:t>Hands, soil clutter, natural outdoor sunlight, blur</a:t>
                       </a:r>
                     </a:p>
                   </a:txBody>
                   <a:tcPr>
                     <a:solidFill>
-                      <a:srgbClr val="182A1F"/>
+                      <a:srgbClr val="16261C"/>
                     </a:solidFill>
                   </a:tcPr>
                 </a:tc>
@@ -6740,7 +7987,7 @@
                   </a:txBody>
                   <a:tcPr>
                     <a:solidFill>
-                      <a:srgbClr val="182A1F"/>
+                      <a:srgbClr val="16261C"/>
                     </a:solidFill>
                   </a:tcPr>
                 </a:tc>
@@ -6763,7 +8010,7 @@
                   </a:txBody>
                   <a:tcPr>
                     <a:solidFill>
-                      <a:srgbClr val="182A1F"/>
+                      <a:srgbClr val="16261C"/>
                     </a:solidFill>
                   </a:tcPr>
                 </a:tc>
@@ -6775,7 +8022,7 @@
                       <a:pPr>
                         <a:defRPr sz="1200">
                           <a:solidFill>
-                            <a:srgbClr val="2EAF69"/>
+                            <a:srgbClr val="22C55E"/>
                           </a:solidFill>
                         </a:defRPr>
                       </a:pPr>
@@ -6786,7 +8033,7 @@
                   </a:txBody>
                   <a:tcPr>
                     <a:solidFill>
-                      <a:srgbClr val="182A1F"/>
+                      <a:srgbClr val="16261C"/>
                     </a:solidFill>
                   </a:tcPr>
                 </a:tc>
@@ -6805,13 +8052,13 @@
                         </a:defRPr>
                       </a:pPr>
                       <a:r>
-                        <a:t>Out-of-Distribution</a:t>
+                        <a:t>Out-of-Distribution Rejection</a:t>
                       </a:r>
                     </a:p>
                   </a:txBody>
                   <a:tcPr>
                     <a:solidFill>
-                      <a:srgbClr val="182A1F"/>
+                      <a:srgbClr val="16261C"/>
                     </a:solidFill>
                   </a:tcPr>
                 </a:tc>
@@ -6834,7 +8081,7 @@
                   </a:txBody>
                   <a:tcPr>
                     <a:solidFill>
-                      <a:srgbClr val="182A1F"/>
+                      <a:srgbClr val="16261C"/>
                     </a:solidFill>
                   </a:tcPr>
                 </a:tc>
@@ -6846,7 +8093,7 @@
                       <a:pPr>
                         <a:defRPr sz="1200">
                           <a:solidFill>
-                            <a:srgbClr val="2EAF69"/>
+                            <a:srgbClr val="22C55E"/>
                           </a:solidFill>
                         </a:defRPr>
                       </a:pPr>
@@ -6857,7 +8104,7 @@
                   </a:txBody>
                   <a:tcPr>
                     <a:solidFill>
-                      <a:srgbClr val="182A1F"/>
+                      <a:srgbClr val="16261C"/>
                     </a:solidFill>
                   </a:tcPr>
                 </a:tc>
@@ -6869,7 +8116,7 @@
                       <a:pPr>
                         <a:defRPr sz="1200">
                           <a:solidFill>
-                            <a:srgbClr val="2EAF69"/>
+                            <a:srgbClr val="22C55E"/>
                           </a:solidFill>
                         </a:defRPr>
                       </a:pPr>
@@ -6880,7 +8127,7 @@
                   </a:txBody>
                   <a:tcPr>
                     <a:solidFill>
-                      <a:srgbClr val="182A1F"/>
+                      <a:srgbClr val="16261C"/>
                     </a:solidFill>
                   </a:tcPr>
                 </a:tc>
@@ -6897,13 +8144,13 @@
                         </a:defRPr>
                       </a:pPr>
                       <a:r>
-                        <a:t>N/A</a:t>
+                        <a:t>Guaranteed Safe</a:t>
                       </a:r>
                     </a:p>
                   </a:txBody>
                   <a:tcPr>
                     <a:solidFill>
-                      <a:srgbClr val="182A1F"/>
+                      <a:srgbClr val="16261C"/>
                     </a:solidFill>
                   </a:tcPr>
                 </a:tc>
@@ -6942,7 +8189,7 @@
               </a:defRPr>
             </a:pPr>
             <a:r>
-              <a:t>💡 Key Insight: Lab-only models collapse when deployed on real farms. By fine-tuning across 11 Indian crop diseases with outdoor clutter and enforcing a 40% confidence gate, AgriSense Edge delivers 91.9% Top-3 field accuracy with 0% false certainty.</a:t>
+              <a:t>💡 Rigorous Agronomy Finding: Lab-only models fail catastrophically in real fields due to soil clutter and lighting variations. AgriSense Edge preserves 91.9% Top-3 accuracy on noisy field data with a strict 40% confidence threshold that eliminates false diagnoses.</a:t>
             </a:r>
           </a:p>
         </p:txBody>
@@ -6955,7 +8202,7 @@
 </p:sld>
 </file>
 
-<file path=ppt/slides/slide8.xml><?xml version="1.0" encoding="utf-8"?>
+<file path=ppt/slides/slide9.xml><?xml version="1.0" encoding="utf-8"?>
 <p:sld xmlns:a="http://schemas.openxmlformats.org/drawingml/2006/main" xmlns:p="http://schemas.openxmlformats.org/presentationml/2006/main" xmlns:r="http://schemas.openxmlformats.org/officeDocument/2006/relationships">
   <p:cSld>
     <p:spTree>
@@ -6980,7 +8227,7 @@
             <a:avLst/>
           </a:prstGeom>
           <a:solidFill>
-            <a:srgbClr val="0F1C14"/>
+            <a:srgbClr val="0D1711"/>
           </a:solidFill>
           <a:ln>
             <a:noFill/>
@@ -7016,8 +8263,8 @@
         </p:nvSpPr>
         <p:spPr>
           <a:xfrm>
-            <a:off x="731520" y="457200"/>
-            <a:ext cx="7315200" cy="365760"/>
+            <a:off x="731520" y="411480"/>
+            <a:ext cx="10058400" cy="320040"/>
           </a:xfrm>
           <a:prstGeom prst="rect">
             <a:avLst/>
@@ -7033,12 +8280,12 @@
             <a:pPr>
               <a:defRPr sz="1100" b="1">
                 <a:solidFill>
-                  <a:srgbClr val="2EAF69"/>
+                  <a:srgbClr val="22C55E"/>
                 </a:solidFill>
               </a:defRPr>
             </a:pPr>
             <a:r>
-              <a:t>QUALCOMM SNAPDRAGON AI LAB CHALLENGE</a:t>
+              <a:t>QUALCOMM SNAPDRAGON AI LAB BUILD &amp; PRESENT CHALLENGE</a:t>
             </a:r>
           </a:p>
         </p:txBody>
@@ -7051,8 +8298,8 @@
         </p:nvSpPr>
         <p:spPr>
           <a:xfrm>
-            <a:off x="731520" y="777240"/>
-            <a:ext cx="10515600" cy="731520"/>
+            <a:off x="731520" y="713232"/>
+            <a:ext cx="10728655" cy="685800"/>
           </a:xfrm>
           <a:prstGeom prst="rect">
             <a:avLst/>
@@ -7066,14 +8313,14 @@
           <a:lstStyle/>
           <a:p>
             <a:pPr>
-              <a:defRPr sz="2800" b="1">
+              <a:defRPr sz="2600" b="1">
                 <a:solidFill>
                   <a:srgbClr val="F8FAFC"/>
                 </a:solidFill>
               </a:defRPr>
             </a:pPr>
             <a:r>
-              <a:t>Roadmap &amp; Scaling to 140M Indian Farmers</a:t>
+              <a:t>Field Usability &amp; 100% Offline Network Proof</a:t>
             </a:r>
           </a:p>
         </p:txBody>
@@ -7086,18 +8333,18 @@
         </p:nvSpPr>
         <p:spPr>
           <a:xfrm>
-            <a:off x="731520" y="1828800"/>
-            <a:ext cx="3438144" cy="4114800"/>
+            <a:off x="731520" y="1645920"/>
+            <a:ext cx="2560320" cy="4572000"/>
           </a:xfrm>
           <a:prstGeom prst="roundRect">
             <a:avLst/>
           </a:prstGeom>
           <a:solidFill>
-            <a:srgbClr val="182A1F"/>
+            <a:srgbClr val="16261C"/>
           </a:solidFill>
           <a:ln w="19050">
             <a:solidFill>
-              <a:srgbClr val="2EAF69"/>
+              <a:srgbClr val="22C55E"/>
             </a:solidFill>
           </a:ln>
         </p:spPr>
@@ -7131,8 +8378,8 @@
         </p:nvSpPr>
         <p:spPr>
           <a:xfrm>
-            <a:off x="914400" y="2103120"/>
-            <a:ext cx="3072384" cy="3474720"/>
+            <a:off x="896112" y="1920240"/>
+            <a:ext cx="2231136" cy="4023360"/>
           </a:xfrm>
           <a:prstGeom prst="rect">
             <a:avLst/>
@@ -7147,28 +8394,28 @@
           <a:p>
             <a:pPr>
               <a:spcAft>
-                <a:spcPts val="1400"/>
+                <a:spcPts val="1200"/>
               </a:spcAft>
-              <a:defRPr sz="1800" b="1">
-                <a:solidFill>
-                  <a:srgbClr val="2EAF69"/>
+              <a:defRPr sz="1700" b="1">
+                <a:solidFill>
+                  <a:srgbClr val="22C55E"/>
                 </a:solidFill>
               </a:defRPr>
             </a:pPr>
             <a:r>
-              <a:t>1. Agronomist Sign-Off</a:t>
+              <a:t>Tactile Voice-First UI</a:t>
             </a:r>
           </a:p>
           <a:p>
             <a:pPr>
-              <a:defRPr sz="1400">
-                <a:solidFill>
-                  <a:srgbClr val="94A3B8"/>
+              <a:defRPr sz="1200">
+                <a:solidFill>
+                  <a:srgbClr val="9CA3AF"/>
                 </a:solidFill>
               </a:defRPr>
             </a:pPr>
             <a:r>
-              <a:t>Formal validation partnership with Indian Council of Agricultural Research (ICAR) &amp; State Agricultural Universities to ratify treatment notes.</a:t>
+              <a:t>High-contrast dark mode designed for direct sunlight readability. Giant microphone and camera buttons optimized for field tablets and muddy hands.</a:t>
             </a:r>
           </a:p>
         </p:txBody>
@@ -7181,14 +8428,14 @@
         </p:nvSpPr>
         <p:spPr>
           <a:xfrm>
-            <a:off x="4370832" y="1828800"/>
-            <a:ext cx="3438144" cy="4114800"/>
+            <a:off x="3456432" y="1645920"/>
+            <a:ext cx="2560320" cy="4572000"/>
           </a:xfrm>
           <a:prstGeom prst="roundRect">
             <a:avLst/>
           </a:prstGeom>
           <a:solidFill>
-            <a:srgbClr val="182A1F"/>
+            <a:srgbClr val="16261C"/>
           </a:solidFill>
           <a:ln w="19050">
             <a:solidFill>
@@ -7226,8 +8473,8 @@
         </p:nvSpPr>
         <p:spPr>
           <a:xfrm>
-            <a:off x="4553712" y="2103120"/>
-            <a:ext cx="3072384" cy="3474720"/>
+            <a:off x="3621024" y="1920240"/>
+            <a:ext cx="2231136" cy="4023360"/>
           </a:xfrm>
           <a:prstGeom prst="rect">
             <a:avLst/>
@@ -7242,28 +8489,28 @@
           <a:p>
             <a:pPr>
               <a:spcAft>
-                <a:spcPts val="1400"/>
+                <a:spcPts val="1200"/>
               </a:spcAft>
-              <a:defRPr sz="1800" b="1">
+              <a:defRPr sz="1700" b="1">
                 <a:solidFill>
                   <a:srgbClr val="F59E0B"/>
                 </a:solidFill>
               </a:defRPr>
             </a:pPr>
             <a:r>
-              <a:t>2. Dialect Fine-Tuning</a:t>
+              <a:t>3-Part Actionable Advice</a:t>
             </a:r>
           </a:p>
           <a:p>
             <a:pPr>
-              <a:defRPr sz="1400">
-                <a:solidFill>
-                  <a:srgbClr val="94A3B8"/>
+              <a:defRPr sz="1200">
+                <a:solidFill>
+                  <a:srgbClr val="9CA3AF"/>
                 </a:solidFill>
               </a:defRPr>
             </a:pPr>
             <a:r>
-              <a:t>Expand Whisper ASR to regional Hindi dialects (Bhojpuri, Bundelkhandi, Malvi, Chhattisgarhi) collected via Krishi Vigyan Kendras.</a:t>
+              <a:t>Output strictly structured: (1) क्या दिख रहा है (Symptoms), (2) क्या करना चाहिए (Remedy), (3) कब विशेषज्ञ से मिलें (Escalation).</a:t>
             </a:r>
           </a:p>
         </p:txBody>
@@ -7276,18 +8523,18 @@
         </p:nvSpPr>
         <p:spPr>
           <a:xfrm>
-            <a:off x="8010144" y="1828800"/>
-            <a:ext cx="3438144" cy="4114800"/>
+            <a:off x="6181344" y="1645920"/>
+            <a:ext cx="2560320" cy="4572000"/>
           </a:xfrm>
           <a:prstGeom prst="roundRect">
             <a:avLst/>
           </a:prstGeom>
           <a:solidFill>
-            <a:srgbClr val="182A1F"/>
+            <a:srgbClr val="16261C"/>
           </a:solidFill>
           <a:ln w="19050">
             <a:solidFill>
-              <a:srgbClr val="E02020"/>
+              <a:srgbClr val="22C55E"/>
             </a:solidFill>
           </a:ln>
         </p:spPr>
@@ -7321,8 +8568,8 @@
         </p:nvSpPr>
         <p:spPr>
           <a:xfrm>
-            <a:off x="8193024" y="2103120"/>
-            <a:ext cx="3072384" cy="3474720"/>
+            <a:off x="6345936" y="1920240"/>
+            <a:ext cx="2231136" cy="4023360"/>
           </a:xfrm>
           <a:prstGeom prst="rect">
             <a:avLst/>
@@ -7337,28 +8584,123 @@
           <a:p>
             <a:pPr>
               <a:spcAft>
-                <a:spcPts val="1400"/>
+                <a:spcPts val="1200"/>
               </a:spcAft>
-              <a:defRPr sz="1800" b="1">
-                <a:solidFill>
-                  <a:srgbClr val="E02020"/>
+              <a:defRPr sz="1700" b="1">
+                <a:solidFill>
+                  <a:srgbClr val="22C55E"/>
                 </a:solidFill>
               </a:defRPr>
             </a:pPr>
             <a:r>
-              <a:t>3. Mobile Snapdragon App</a:t>
+              <a:t>Air-Gapped Network Isolation</a:t>
             </a:r>
           </a:p>
           <a:p>
             <a:pPr>
-              <a:defRPr sz="1400">
-                <a:solidFill>
-                  <a:srgbClr val="94A3B8"/>
+              <a:defRPr sz="1200">
+                <a:solidFill>
+                  <a:srgbClr val="9CA3AF"/>
                 </a:solidFill>
               </a:defRPr>
             </a:pPr>
             <a:r>
-              <a:t>Package ONNX/QNN runtime into native Android APK for Snapdragon mobile chipsets (Snapdragon 8 Gen 3/4) for field agents.</a:t>
+              <a:t>Verified with `tests/test_offline.py` where all socket connections are blocked at the OS level. The full diagnostic pipeline executes with 0 bytes transmitted.</a:t>
+            </a:r>
+          </a:p>
+        </p:txBody>
+      </p:sp>
+      <p:sp>
+        <p:nvSpPr>
+          <p:cNvPr id="11" name="Rounded Rectangle 10"/>
+          <p:cNvSpPr/>
+          <p:nvPr/>
+        </p:nvSpPr>
+        <p:spPr>
+          <a:xfrm>
+            <a:off x="8906256" y="1645920"/>
+            <a:ext cx="2560320" cy="4572000"/>
+          </a:xfrm>
+          <a:prstGeom prst="roundRect">
+            <a:avLst/>
+          </a:prstGeom>
+          <a:solidFill>
+            <a:srgbClr val="16261C"/>
+          </a:solidFill>
+          <a:ln w="19050">
+            <a:solidFill>
+              <a:srgbClr val="38BDF8"/>
+            </a:solidFill>
+          </a:ln>
+        </p:spPr>
+        <p:style>
+          <a:lnRef idx="1">
+            <a:schemeClr val="accent1"/>
+          </a:lnRef>
+          <a:fillRef idx="3">
+            <a:schemeClr val="accent1"/>
+          </a:fillRef>
+          <a:effectRef idx="2">
+            <a:schemeClr val="accent1"/>
+          </a:effectRef>
+          <a:fontRef idx="minor">
+            <a:schemeClr val="lt1"/>
+          </a:fontRef>
+        </p:style>
+        <p:txBody>
+          <a:bodyPr rtlCol="0" anchor="ctr"/>
+          <a:lstStyle/>
+          <a:p>
+            <a:pPr algn="ctr"/>
+          </a:p>
+        </p:txBody>
+      </p:sp>
+      <p:sp>
+        <p:nvSpPr>
+          <p:cNvPr id="12" name="TextBox 11"/>
+          <p:cNvSpPr txBox="1"/>
+          <p:nvPr/>
+        </p:nvSpPr>
+        <p:spPr>
+          <a:xfrm>
+            <a:off x="9070848" y="1920240"/>
+            <a:ext cx="2231136" cy="4023360"/>
+          </a:xfrm>
+          <a:prstGeom prst="rect">
+            <a:avLst/>
+          </a:prstGeom>
+          <a:noFill/>
+        </p:spPr>
+        <p:txBody>
+          <a:bodyPr wrap="square">
+            <a:spAutoFit/>
+          </a:bodyPr>
+          <a:lstStyle/>
+          <a:p>
+            <a:pPr>
+              <a:spcAft>
+                <a:spcPts val="1200"/>
+              </a:spcAft>
+              <a:defRPr sz="1700" b="1">
+                <a:solidFill>
+                  <a:srgbClr val="38BDF8"/>
+                </a:solidFill>
+              </a:defRPr>
+            </a:pPr>
+            <a:r>
+              <a:t>One-Click Local Deployment</a:t>
+            </a:r>
+          </a:p>
+          <a:p>
+            <a:pPr>
+              <a:defRPr sz="1200">
+                <a:solidFill>
+                  <a:srgbClr val="9CA3AF"/>
+                </a:solidFill>
+              </a:defRPr>
+            </a:pPr>
+            <a:r>
+              <a:t>Single-command deployment via PowerShell (`setup_windows.ps1`) and batch scripts (`run.bat`). Runs out of the box on Snapdragon X HP PCs.</a:t>
             </a:r>
           </a:p>
         </p:txBody>
